--- a/GFX-T Onboarding Kit/PPT/03 - Go-Live & Handover.pptx
+++ b/GFX-T Onboarding Kit/PPT/03 - Go-Live & Handover.pptx
@@ -4309,6 +4309,122 @@
       <p:sp>
         <p:nvSpPr>
           <p:cNvPr id="71" name=""/>
+          <p:cNvSpPr/>
+          <p:nvPr/>
+        </p:nvSpPr>
+        <p:spPr>
+          <a:xfrm>
+            <a:off x="647640" y="8029440"/>
+            <a:ext cx="1895760" cy="9720"/>
+          </a:xfrm>
+          <a:custGeom>
+            <a:avLst/>
+            <a:gdLst/>
+            <a:ahLst/>
+            <a:rect l="0" t="0" r="r" b="b"/>
+            <a:pathLst>
+              <a:path w="5266" h="27">
+                <a:moveTo>
+                  <a:pt x="0" y="0"/>
+                </a:moveTo>
+                <a:lnTo>
+                  <a:pt x="5266" y="0"/>
+                </a:lnTo>
+                <a:lnTo>
+                  <a:pt x="5266" y="27"/>
+                </a:lnTo>
+                <a:lnTo>
+                  <a:pt x="0" y="27"/>
+                </a:lnTo>
+                <a:lnTo>
+                  <a:pt x="0" y="0"/>
+                </a:lnTo>
+                <a:close/>
+              </a:path>
+            </a:pathLst>
+          </a:custGeom>
+          <a:solidFill>
+            <a:srgbClr val="bdb5b7"/>
+          </a:solidFill>
+          <a:ln w="0">
+            <a:noFill/>
+          </a:ln>
+        </p:spPr>
+        <p:txBody>
+          <a:bodyPr lIns="0" rIns="0" tIns="0" bIns="0" anchor="t">
+            <a:noAutofit/>
+          </a:bodyPr>
+          <a:p>
+            <a:endParaRPr b="0" lang="en-US" sz="2400" spc="-1" strike="noStrike">
+              <a:solidFill>
+                <a:srgbClr val="000000"/>
+              </a:solidFill>
+              <a:latin typeface="Times New Roman"/>
+            </a:endParaRPr>
+          </a:p>
+        </p:txBody>
+      </p:sp>
+      <p:sp>
+        <p:nvSpPr>
+          <p:cNvPr id="72" name=""/>
+          <p:cNvSpPr/>
+          <p:nvPr/>
+        </p:nvSpPr>
+        <p:spPr>
+          <a:xfrm>
+            <a:off x="647640" y="8610480"/>
+            <a:ext cx="1895760" cy="9720"/>
+          </a:xfrm>
+          <a:custGeom>
+            <a:avLst/>
+            <a:gdLst/>
+            <a:ahLst/>
+            <a:rect l="0" t="0" r="r" b="b"/>
+            <a:pathLst>
+              <a:path w="5266" h="27">
+                <a:moveTo>
+                  <a:pt x="0" y="0"/>
+                </a:moveTo>
+                <a:lnTo>
+                  <a:pt x="5266" y="0"/>
+                </a:lnTo>
+                <a:lnTo>
+                  <a:pt x="5266" y="27"/>
+                </a:lnTo>
+                <a:lnTo>
+                  <a:pt x="0" y="27"/>
+                </a:lnTo>
+                <a:lnTo>
+                  <a:pt x="0" y="0"/>
+                </a:lnTo>
+                <a:close/>
+              </a:path>
+            </a:pathLst>
+          </a:custGeom>
+          <a:solidFill>
+            <a:srgbClr val="bdb5b7"/>
+          </a:solidFill>
+          <a:ln w="0">
+            <a:noFill/>
+          </a:ln>
+        </p:spPr>
+        <p:txBody>
+          <a:bodyPr lIns="0" rIns="0" tIns="0" bIns="0" anchor="t">
+            <a:noAutofit/>
+          </a:bodyPr>
+          <a:p>
+            <a:endParaRPr b="0" lang="en-US" sz="2400" spc="-1" strike="noStrike">
+              <a:solidFill>
+                <a:srgbClr val="000000"/>
+              </a:solidFill>
+              <a:latin typeface="Times New Roman"/>
+            </a:endParaRPr>
+          </a:p>
+        </p:txBody>
+      </p:sp>
+      <p:sp>
+        <p:nvSpPr>
+          <p:cNvPr id="73" name=""/>
           <p:cNvSpPr txBox="1"/>
           <p:nvPr/>
         </p:nvSpPr>
@@ -4351,65 +4467,7 @@
       </p:sp>
       <p:sp>
         <p:nvSpPr>
-          <p:cNvPr id="72" name=""/>
-          <p:cNvSpPr/>
-          <p:nvPr/>
-        </p:nvSpPr>
-        <p:spPr>
-          <a:xfrm>
-            <a:off x="647640" y="8029440"/>
-            <a:ext cx="1391040" cy="9720"/>
-          </a:xfrm>
-          <a:custGeom>
-            <a:avLst/>
-            <a:gdLst/>
-            <a:ahLst/>
-            <a:rect l="0" t="0" r="r" b="b"/>
-            <a:pathLst>
-              <a:path w="3864" h="27">
-                <a:moveTo>
-                  <a:pt x="0" y="0"/>
-                </a:moveTo>
-                <a:lnTo>
-                  <a:pt x="3864" y="0"/>
-                </a:lnTo>
-                <a:lnTo>
-                  <a:pt x="3864" y="27"/>
-                </a:lnTo>
-                <a:lnTo>
-                  <a:pt x="0" y="27"/>
-                </a:lnTo>
-                <a:lnTo>
-                  <a:pt x="0" y="0"/>
-                </a:lnTo>
-                <a:close/>
-              </a:path>
-            </a:pathLst>
-          </a:custGeom>
-          <a:solidFill>
-            <a:srgbClr val="bdb5b7"/>
-          </a:solidFill>
-          <a:ln w="0">
-            <a:noFill/>
-          </a:ln>
-        </p:spPr>
-        <p:txBody>
-          <a:bodyPr lIns="0" rIns="0" tIns="0" bIns="0" anchor="t">
-            <a:noAutofit/>
-          </a:bodyPr>
-          <a:p>
-            <a:endParaRPr b="0" lang="en-US" sz="2400" spc="-1" strike="noStrike">
-              <a:solidFill>
-                <a:srgbClr val="000000"/>
-              </a:solidFill>
-              <a:latin typeface="Times New Roman"/>
-            </a:endParaRPr>
-          </a:p>
-        </p:txBody>
-      </p:sp>
-      <p:sp>
-        <p:nvSpPr>
-          <p:cNvPr id="73" name=""/>
+          <p:cNvPr id="74" name=""/>
           <p:cNvSpPr txBox="1"/>
           <p:nvPr/>
         </p:nvSpPr>
@@ -4452,64 +4510,6 @@
       </p:sp>
       <p:sp>
         <p:nvSpPr>
-          <p:cNvPr id="74" name=""/>
-          <p:cNvSpPr/>
-          <p:nvPr/>
-        </p:nvSpPr>
-        <p:spPr>
-          <a:xfrm>
-            <a:off x="2219040" y="8029440"/>
-            <a:ext cx="1381680" cy="9720"/>
-          </a:xfrm>
-          <a:custGeom>
-            <a:avLst/>
-            <a:gdLst/>
-            <a:ahLst/>
-            <a:rect l="0" t="0" r="r" b="b"/>
-            <a:pathLst>
-              <a:path w="3838" h="27">
-                <a:moveTo>
-                  <a:pt x="0" y="0"/>
-                </a:moveTo>
-                <a:lnTo>
-                  <a:pt x="3838" y="0"/>
-                </a:lnTo>
-                <a:lnTo>
-                  <a:pt x="3838" y="27"/>
-                </a:lnTo>
-                <a:lnTo>
-                  <a:pt x="0" y="27"/>
-                </a:lnTo>
-                <a:lnTo>
-                  <a:pt x="0" y="0"/>
-                </a:lnTo>
-                <a:close/>
-              </a:path>
-            </a:pathLst>
-          </a:custGeom>
-          <a:solidFill>
-            <a:srgbClr val="bdb5b7"/>
-          </a:solidFill>
-          <a:ln w="0">
-            <a:noFill/>
-          </a:ln>
-        </p:spPr>
-        <p:txBody>
-          <a:bodyPr lIns="0" rIns="0" tIns="0" bIns="0" anchor="t">
-            <a:noAutofit/>
-          </a:bodyPr>
-          <a:p>
-            <a:endParaRPr b="0" lang="en-US" sz="2400" spc="-1" strike="noStrike">
-              <a:solidFill>
-                <a:srgbClr val="000000"/>
-              </a:solidFill>
-              <a:latin typeface="Times New Roman"/>
-            </a:endParaRPr>
-          </a:p>
-        </p:txBody>
-      </p:sp>
-      <p:sp>
-        <p:nvSpPr>
           <p:cNvPr id="75" name=""/>
           <p:cNvSpPr txBox="1"/>
           <p:nvPr/>
@@ -4559,7 +4559,664 @@
         </p:nvSpPr>
         <p:spPr>
           <a:xfrm>
-            <a:off x="2214720" y="7520760"/>
+            <a:off x="647640" y="8178120"/>
+            <a:ext cx="1674000" cy="100800"/>
+          </a:xfrm>
+          <a:prstGeom prst="rect">
+            <a:avLst/>
+          </a:prstGeom>
+          <a:noFill/>
+          <a:ln w="0">
+            <a:noFill/>
+          </a:ln>
+        </p:spPr>
+        <p:txBody>
+          <a:bodyPr wrap="none" lIns="0" rIns="0" tIns="0" bIns="0" anchor="t">
+            <a:noAutofit/>
+          </a:bodyPr>
+          <a:p>
+            <a:r>
+              <a:rPr b="1" lang="en-US" sz="680" spc="-1" strike="noStrike">
+                <a:solidFill>
+                  <a:srgbClr val="6b6878"/>
+                </a:solidFill>
+                <a:latin typeface="Inter-Semi"/>
+                <a:ea typeface="Inter-Semi"/>
+              </a:rPr>
+              <a:t>C E O   &amp;   F O U N D E R   ·   DAT E</a:t>
+            </a:r>
+            <a:endParaRPr b="0" lang="en-US" sz="680" spc="-1" strike="noStrike">
+              <a:solidFill>
+                <a:srgbClr val="000000"/>
+              </a:solidFill>
+              <a:latin typeface="Times New Roman"/>
+            </a:endParaRPr>
+          </a:p>
+        </p:txBody>
+      </p:sp>
+      <p:sp>
+        <p:nvSpPr>
+          <p:cNvPr id="77" name=""/>
+          <p:cNvSpPr/>
+          <p:nvPr/>
+        </p:nvSpPr>
+        <p:spPr>
+          <a:xfrm>
+            <a:off x="2828880" y="8029440"/>
+            <a:ext cx="1905120" cy="9720"/>
+          </a:xfrm>
+          <a:custGeom>
+            <a:avLst/>
+            <a:gdLst/>
+            <a:ahLst/>
+            <a:rect l="0" t="0" r="r" b="b"/>
+            <a:pathLst>
+              <a:path w="5292" h="27">
+                <a:moveTo>
+                  <a:pt x="0" y="0"/>
+                </a:moveTo>
+                <a:lnTo>
+                  <a:pt x="5292" y="0"/>
+                </a:lnTo>
+                <a:lnTo>
+                  <a:pt x="5292" y="27"/>
+                </a:lnTo>
+                <a:lnTo>
+                  <a:pt x="0" y="27"/>
+                </a:lnTo>
+                <a:lnTo>
+                  <a:pt x="0" y="0"/>
+                </a:lnTo>
+                <a:close/>
+              </a:path>
+            </a:pathLst>
+          </a:custGeom>
+          <a:solidFill>
+            <a:srgbClr val="bdb5b7"/>
+          </a:solidFill>
+          <a:ln w="0">
+            <a:noFill/>
+          </a:ln>
+        </p:spPr>
+        <p:txBody>
+          <a:bodyPr lIns="0" rIns="0" tIns="0" bIns="0" anchor="t">
+            <a:noAutofit/>
+          </a:bodyPr>
+          <a:p>
+            <a:endParaRPr b="0" lang="en-US" sz="2400" spc="-1" strike="noStrike">
+              <a:solidFill>
+                <a:srgbClr val="000000"/>
+              </a:solidFill>
+              <a:latin typeface="Times New Roman"/>
+            </a:endParaRPr>
+          </a:p>
+        </p:txBody>
+      </p:sp>
+      <p:sp>
+        <p:nvSpPr>
+          <p:cNvPr id="78" name=""/>
+          <p:cNvSpPr/>
+          <p:nvPr/>
+        </p:nvSpPr>
+        <p:spPr>
+          <a:xfrm>
+            <a:off x="2828880" y="8610480"/>
+            <a:ext cx="1905120" cy="9720"/>
+          </a:xfrm>
+          <a:custGeom>
+            <a:avLst/>
+            <a:gdLst/>
+            <a:ahLst/>
+            <a:rect l="0" t="0" r="r" b="b"/>
+            <a:pathLst>
+              <a:path w="5292" h="27">
+                <a:moveTo>
+                  <a:pt x="0" y="0"/>
+                </a:moveTo>
+                <a:lnTo>
+                  <a:pt x="5292" y="0"/>
+                </a:lnTo>
+                <a:lnTo>
+                  <a:pt x="5292" y="27"/>
+                </a:lnTo>
+                <a:lnTo>
+                  <a:pt x="0" y="27"/>
+                </a:lnTo>
+                <a:lnTo>
+                  <a:pt x="0" y="0"/>
+                </a:lnTo>
+                <a:close/>
+              </a:path>
+            </a:pathLst>
+          </a:custGeom>
+          <a:solidFill>
+            <a:srgbClr val="bdb5b7"/>
+          </a:solidFill>
+          <a:ln w="0">
+            <a:noFill/>
+          </a:ln>
+        </p:spPr>
+        <p:txBody>
+          <a:bodyPr lIns="0" rIns="0" tIns="0" bIns="0" anchor="t">
+            <a:noAutofit/>
+          </a:bodyPr>
+          <a:p>
+            <a:endParaRPr b="0" lang="en-US" sz="2400" spc="-1" strike="noStrike">
+              <a:solidFill>
+                <a:srgbClr val="000000"/>
+              </a:solidFill>
+              <a:latin typeface="Times New Roman"/>
+            </a:endParaRPr>
+          </a:p>
+        </p:txBody>
+      </p:sp>
+      <p:sp>
+        <p:nvSpPr>
+          <p:cNvPr id="79" name=""/>
+          <p:cNvSpPr txBox="1"/>
+          <p:nvPr/>
+        </p:nvSpPr>
+        <p:spPr>
+          <a:xfrm>
+            <a:off x="647640" y="8392320"/>
+            <a:ext cx="1082880" cy="153000"/>
+          </a:xfrm>
+          <a:prstGeom prst="rect">
+            <a:avLst/>
+          </a:prstGeom>
+          <a:noFill/>
+          <a:ln w="0">
+            <a:noFill/>
+          </a:ln>
+        </p:spPr>
+        <p:txBody>
+          <a:bodyPr wrap="none" lIns="0" rIns="0" tIns="0" bIns="0" anchor="t">
+            <a:noAutofit/>
+          </a:bodyPr>
+          <a:p>
+            <a:r>
+              <a:rPr b="0" lang="en-US" sz="1000" spc="-1" strike="noStrike">
+                <a:solidFill>
+                  <a:srgbClr val="0e0e14"/>
+                </a:solidFill>
+                <a:latin typeface="Inter"/>
+                <a:ea typeface="Inter"/>
+              </a:rPr>
+              <a:t>Omer Bin Dawood</a:t>
+            </a:r>
+            <a:endParaRPr b="0" lang="en-US" sz="1000" spc="-1" strike="noStrike">
+              <a:solidFill>
+                <a:srgbClr val="000000"/>
+              </a:solidFill>
+              <a:latin typeface="Times New Roman"/>
+            </a:endParaRPr>
+          </a:p>
+        </p:txBody>
+      </p:sp>
+      <p:sp>
+        <p:nvSpPr>
+          <p:cNvPr id="80" name=""/>
+          <p:cNvSpPr txBox="1"/>
+          <p:nvPr/>
+        </p:nvSpPr>
+        <p:spPr>
+          <a:xfrm>
+            <a:off x="2832840" y="7337520"/>
+            <a:ext cx="1770120" cy="104040"/>
+          </a:xfrm>
+          <a:prstGeom prst="rect">
+            <a:avLst/>
+          </a:prstGeom>
+          <a:noFill/>
+          <a:ln w="0">
+            <a:noFill/>
+          </a:ln>
+        </p:spPr>
+        <p:txBody>
+          <a:bodyPr wrap="none" lIns="0" rIns="0" tIns="0" bIns="0" anchor="t">
+            <a:noAutofit/>
+          </a:bodyPr>
+          <a:p>
+            <a:r>
+              <a:rPr b="1" lang="en-US" sz="700" spc="-1" strike="noStrike">
+                <a:solidFill>
+                  <a:srgbClr val="6a26d8"/>
+                </a:solidFill>
+                <a:latin typeface="Inter-Semi"/>
+                <a:ea typeface="Inter-Semi"/>
+              </a:rPr>
+              <a:t>F O R   O B D   A I   S O L U T I O N S</a:t>
+            </a:r>
+            <a:endParaRPr b="0" lang="en-US" sz="700" spc="-1" strike="noStrike">
+              <a:solidFill>
+                <a:srgbClr val="000000"/>
+              </a:solidFill>
+              <a:latin typeface="Times New Roman"/>
+            </a:endParaRPr>
+          </a:p>
+        </p:txBody>
+      </p:sp>
+      <p:sp>
+        <p:nvSpPr>
+          <p:cNvPr id="81" name=""/>
+          <p:cNvSpPr txBox="1"/>
+          <p:nvPr/>
+        </p:nvSpPr>
+        <p:spPr>
+          <a:xfrm>
+            <a:off x="2832840" y="7520760"/>
+            <a:ext cx="773280" cy="100800"/>
+          </a:xfrm>
+          <a:prstGeom prst="rect">
+            <a:avLst/>
+          </a:prstGeom>
+          <a:noFill/>
+          <a:ln w="0">
+            <a:noFill/>
+          </a:ln>
+        </p:spPr>
+        <p:txBody>
+          <a:bodyPr wrap="none" lIns="0" rIns="0" tIns="0" bIns="0" anchor="t">
+            <a:noAutofit/>
+          </a:bodyPr>
+          <a:p>
+            <a:r>
+              <a:rPr b="1" lang="en-US" sz="680" spc="-1" strike="noStrike">
+                <a:solidFill>
+                  <a:srgbClr val="6b6878"/>
+                </a:solidFill>
+                <a:latin typeface="Inter-Semi"/>
+                <a:ea typeface="Inter-Semi"/>
+              </a:rPr>
+              <a:t>S I G N AT U R E</a:t>
+            </a:r>
+            <a:endParaRPr b="0" lang="en-US" sz="680" spc="-1" strike="noStrike">
+              <a:solidFill>
+                <a:srgbClr val="000000"/>
+              </a:solidFill>
+              <a:latin typeface="Times New Roman"/>
+            </a:endParaRPr>
+          </a:p>
+        </p:txBody>
+      </p:sp>
+      <p:sp>
+        <p:nvSpPr>
+          <p:cNvPr id="82" name=""/>
+          <p:cNvSpPr txBox="1"/>
+          <p:nvPr/>
+        </p:nvSpPr>
+        <p:spPr>
+          <a:xfrm>
+            <a:off x="2832840" y="8178120"/>
+            <a:ext cx="2288160" cy="100800"/>
+          </a:xfrm>
+          <a:prstGeom prst="rect">
+            <a:avLst/>
+          </a:prstGeom>
+          <a:noFill/>
+          <a:ln w="0">
+            <a:noFill/>
+          </a:ln>
+        </p:spPr>
+        <p:txBody>
+          <a:bodyPr wrap="none" lIns="0" rIns="0" tIns="0" bIns="0" anchor="t">
+            <a:noAutofit/>
+          </a:bodyPr>
+          <a:p>
+            <a:r>
+              <a:rPr b="1" lang="en-US" sz="680" spc="-1" strike="noStrike">
+                <a:solidFill>
+                  <a:srgbClr val="6b6878"/>
+                </a:solidFill>
+                <a:latin typeface="Inter-Semi"/>
+                <a:ea typeface="Inter-Semi"/>
+              </a:rPr>
+              <a:t>C O - F O U N D E R   &amp;   PA R T N E R   ·   DAT E</a:t>
+            </a:r>
+            <a:endParaRPr b="0" lang="en-US" sz="680" spc="-1" strike="noStrike">
+              <a:solidFill>
+                <a:srgbClr val="000000"/>
+              </a:solidFill>
+              <a:latin typeface="Times New Roman"/>
+            </a:endParaRPr>
+          </a:p>
+        </p:txBody>
+      </p:sp>
+      <p:sp>
+        <p:nvSpPr>
+          <p:cNvPr id="83" name=""/>
+          <p:cNvSpPr/>
+          <p:nvPr/>
+        </p:nvSpPr>
+        <p:spPr>
+          <a:xfrm>
+            <a:off x="5019480" y="8029440"/>
+            <a:ext cx="1895760" cy="9720"/>
+          </a:xfrm>
+          <a:custGeom>
+            <a:avLst/>
+            <a:gdLst/>
+            <a:ahLst/>
+            <a:rect l="0" t="0" r="r" b="b"/>
+            <a:pathLst>
+              <a:path w="5266" h="27">
+                <a:moveTo>
+                  <a:pt x="0" y="0"/>
+                </a:moveTo>
+                <a:lnTo>
+                  <a:pt x="5266" y="0"/>
+                </a:lnTo>
+                <a:lnTo>
+                  <a:pt x="5266" y="27"/>
+                </a:lnTo>
+                <a:lnTo>
+                  <a:pt x="0" y="27"/>
+                </a:lnTo>
+                <a:lnTo>
+                  <a:pt x="0" y="0"/>
+                </a:lnTo>
+                <a:close/>
+              </a:path>
+            </a:pathLst>
+          </a:custGeom>
+          <a:solidFill>
+            <a:srgbClr val="bdb5b7"/>
+          </a:solidFill>
+          <a:ln w="0">
+            <a:noFill/>
+          </a:ln>
+        </p:spPr>
+        <p:txBody>
+          <a:bodyPr lIns="0" rIns="0" tIns="0" bIns="0" anchor="t">
+            <a:noAutofit/>
+          </a:bodyPr>
+          <a:p>
+            <a:endParaRPr b="0" lang="en-US" sz="2400" spc="-1" strike="noStrike">
+              <a:solidFill>
+                <a:srgbClr val="000000"/>
+              </a:solidFill>
+              <a:latin typeface="Times New Roman"/>
+            </a:endParaRPr>
+          </a:p>
+        </p:txBody>
+      </p:sp>
+      <p:sp>
+        <p:nvSpPr>
+          <p:cNvPr id="84" name=""/>
+          <p:cNvSpPr/>
+          <p:nvPr/>
+        </p:nvSpPr>
+        <p:spPr>
+          <a:xfrm>
+            <a:off x="5019480" y="8581680"/>
+            <a:ext cx="1895760" cy="10080"/>
+          </a:xfrm>
+          <a:custGeom>
+            <a:avLst/>
+            <a:gdLst/>
+            <a:ahLst/>
+            <a:rect l="0" t="0" r="r" b="b"/>
+            <a:pathLst>
+              <a:path w="5266" h="28">
+                <a:moveTo>
+                  <a:pt x="0" y="0"/>
+                </a:moveTo>
+                <a:lnTo>
+                  <a:pt x="5266" y="0"/>
+                </a:lnTo>
+                <a:lnTo>
+                  <a:pt x="5266" y="28"/>
+                </a:lnTo>
+                <a:lnTo>
+                  <a:pt x="0" y="28"/>
+                </a:lnTo>
+                <a:lnTo>
+                  <a:pt x="0" y="0"/>
+                </a:lnTo>
+                <a:close/>
+              </a:path>
+            </a:pathLst>
+          </a:custGeom>
+          <a:solidFill>
+            <a:srgbClr val="bdb5b7"/>
+          </a:solidFill>
+          <a:ln w="0">
+            <a:noFill/>
+          </a:ln>
+        </p:spPr>
+        <p:txBody>
+          <a:bodyPr lIns="0" rIns="0" tIns="0" bIns="0" anchor="t">
+            <a:noAutofit/>
+          </a:bodyPr>
+          <a:p>
+            <a:endParaRPr b="0" lang="en-US" sz="2400" spc="-1" strike="noStrike">
+              <a:solidFill>
+                <a:srgbClr val="000000"/>
+              </a:solidFill>
+              <a:latin typeface="Times New Roman"/>
+            </a:endParaRPr>
+          </a:p>
+        </p:txBody>
+      </p:sp>
+      <p:sp>
+        <p:nvSpPr>
+          <p:cNvPr id="85" name=""/>
+          <p:cNvSpPr txBox="1"/>
+          <p:nvPr/>
+        </p:nvSpPr>
+        <p:spPr>
+          <a:xfrm>
+            <a:off x="2832840" y="8392320"/>
+            <a:ext cx="540360" cy="153000"/>
+          </a:xfrm>
+          <a:prstGeom prst="rect">
+            <a:avLst/>
+          </a:prstGeom>
+          <a:noFill/>
+          <a:ln w="0">
+            <a:noFill/>
+          </a:ln>
+        </p:spPr>
+        <p:txBody>
+          <a:bodyPr wrap="none" lIns="0" rIns="0" tIns="0" bIns="0" anchor="t">
+            <a:noAutofit/>
+          </a:bodyPr>
+          <a:p>
+            <a:r>
+              <a:rPr b="0" lang="en-US" sz="1000" spc="-1" strike="noStrike">
+                <a:solidFill>
+                  <a:srgbClr val="0e0e14"/>
+                </a:solidFill>
+                <a:latin typeface="Inter"/>
+                <a:ea typeface="Inter"/>
+              </a:rPr>
+              <a:t>Hira Baig</a:t>
+            </a:r>
+            <a:endParaRPr b="0" lang="en-US" sz="1000" spc="-1" strike="noStrike">
+              <a:solidFill>
+                <a:srgbClr val="000000"/>
+              </a:solidFill>
+              <a:latin typeface="Times New Roman"/>
+            </a:endParaRPr>
+          </a:p>
+        </p:txBody>
+      </p:sp>
+      <p:sp>
+        <p:nvSpPr>
+          <p:cNvPr id="86" name=""/>
+          <p:cNvSpPr txBox="1"/>
+          <p:nvPr/>
+        </p:nvSpPr>
+        <p:spPr>
+          <a:xfrm>
+            <a:off x="5018040" y="7337520"/>
+            <a:ext cx="777960" cy="104040"/>
+          </a:xfrm>
+          <a:prstGeom prst="rect">
+            <a:avLst/>
+          </a:prstGeom>
+          <a:noFill/>
+          <a:ln w="0">
+            <a:noFill/>
+          </a:ln>
+        </p:spPr>
+        <p:txBody>
+          <a:bodyPr wrap="none" lIns="0" rIns="0" tIns="0" bIns="0" anchor="t">
+            <a:noAutofit/>
+          </a:bodyPr>
+          <a:p>
+            <a:r>
+              <a:rPr b="1" lang="en-US" sz="700" spc="-1" strike="noStrike">
+                <a:solidFill>
+                  <a:srgbClr val="6a26d8"/>
+                </a:solidFill>
+                <a:latin typeface="Inter-Semi"/>
+                <a:ea typeface="Inter-Semi"/>
+              </a:rPr>
+              <a:t>F O R   G F X - T</a:t>
+            </a:r>
+            <a:endParaRPr b="0" lang="en-US" sz="700" spc="-1" strike="noStrike">
+              <a:solidFill>
+                <a:srgbClr val="000000"/>
+              </a:solidFill>
+              <a:latin typeface="Times New Roman"/>
+            </a:endParaRPr>
+          </a:p>
+        </p:txBody>
+      </p:sp>
+      <p:sp>
+        <p:nvSpPr>
+          <p:cNvPr id="87" name=""/>
+          <p:cNvSpPr txBox="1"/>
+          <p:nvPr/>
+        </p:nvSpPr>
+        <p:spPr>
+          <a:xfrm>
+            <a:off x="5018040" y="7520760"/>
+            <a:ext cx="773280" cy="100800"/>
+          </a:xfrm>
+          <a:prstGeom prst="rect">
+            <a:avLst/>
+          </a:prstGeom>
+          <a:noFill/>
+          <a:ln w="0">
+            <a:noFill/>
+          </a:ln>
+        </p:spPr>
+        <p:txBody>
+          <a:bodyPr wrap="none" lIns="0" rIns="0" tIns="0" bIns="0" anchor="t">
+            <a:noAutofit/>
+          </a:bodyPr>
+          <a:p>
+            <a:r>
+              <a:rPr b="1" lang="en-US" sz="680" spc="-1" strike="noStrike">
+                <a:solidFill>
+                  <a:srgbClr val="6b6878"/>
+                </a:solidFill>
+                <a:latin typeface="Inter-Semi"/>
+                <a:ea typeface="Inter-Semi"/>
+              </a:rPr>
+              <a:t>S I G N AT U R E</a:t>
+            </a:r>
+            <a:endParaRPr b="0" lang="en-US" sz="680" spc="-1" strike="noStrike">
+              <a:solidFill>
+                <a:srgbClr val="000000"/>
+              </a:solidFill>
+              <a:latin typeface="Times New Roman"/>
+            </a:endParaRPr>
+          </a:p>
+        </p:txBody>
+      </p:sp>
+      <p:sp>
+        <p:nvSpPr>
+          <p:cNvPr id="88" name=""/>
+          <p:cNvSpPr/>
+          <p:nvPr/>
+        </p:nvSpPr>
+        <p:spPr>
+          <a:xfrm>
+            <a:off x="647640" y="1695240"/>
+            <a:ext cx="6267600" cy="10080"/>
+          </a:xfrm>
+          <a:custGeom>
+            <a:avLst/>
+            <a:gdLst/>
+            <a:ahLst/>
+            <a:rect l="0" t="0" r="r" b="b"/>
+            <a:pathLst>
+              <a:path w="17410" h="28">
+                <a:moveTo>
+                  <a:pt x="0" y="0"/>
+                </a:moveTo>
+                <a:lnTo>
+                  <a:pt x="17410" y="0"/>
+                </a:lnTo>
+                <a:lnTo>
+                  <a:pt x="17410" y="28"/>
+                </a:lnTo>
+                <a:lnTo>
+                  <a:pt x="0" y="28"/>
+                </a:lnTo>
+                <a:lnTo>
+                  <a:pt x="0" y="0"/>
+                </a:lnTo>
+                <a:close/>
+              </a:path>
+            </a:pathLst>
+          </a:custGeom>
+          <a:solidFill>
+            <a:srgbClr val="e6e1f0"/>
+          </a:solidFill>
+          <a:ln w="0">
+            <a:noFill/>
+          </a:ln>
+        </p:spPr>
+        <p:txBody>
+          <a:bodyPr lIns="0" rIns="0" tIns="0" bIns="0" anchor="t">
+            <a:noAutofit/>
+          </a:bodyPr>
+          <a:p>
+            <a:endParaRPr b="0" lang="en-US" sz="2400" spc="-1" strike="noStrike">
+              <a:solidFill>
+                <a:srgbClr val="000000"/>
+              </a:solidFill>
+              <a:latin typeface="Times New Roman"/>
+            </a:endParaRPr>
+          </a:p>
+        </p:txBody>
+      </p:sp>
+      <p:pic>
+        <p:nvPicPr>
+          <p:cNvPr id="89" name="" descr=""/>
+          <p:cNvPicPr/>
+          <p:nvPr/>
+        </p:nvPicPr>
+        <p:blipFill>
+          <a:blip r:embed="rId1"/>
+          <a:stretch/>
+        </p:blipFill>
+        <p:spPr>
+          <a:xfrm>
+            <a:off x="647640" y="504720"/>
+            <a:ext cx="409320" cy="399600"/>
+          </a:xfrm>
+          <a:prstGeom prst="rect">
+            <a:avLst/>
+          </a:prstGeom>
+          <a:ln w="0">
+            <a:noFill/>
+          </a:ln>
+        </p:spPr>
+      </p:pic>
+      <p:sp>
+        <p:nvSpPr>
+          <p:cNvPr id="90" name=""/>
+          <p:cNvSpPr txBox="1"/>
+          <p:nvPr/>
+        </p:nvSpPr>
+        <p:spPr>
+          <a:xfrm>
+            <a:off x="5018040" y="8178120"/>
             <a:ext cx="878400" cy="100800"/>
           </a:xfrm>
           <a:prstGeom prst="rect">
@@ -4596,376 +5253,7 @@
       </p:sp>
       <p:sp>
         <p:nvSpPr>
-          <p:cNvPr id="77" name=""/>
-          <p:cNvSpPr txBox="1"/>
-          <p:nvPr/>
-        </p:nvSpPr>
-        <p:spPr>
-          <a:xfrm>
-            <a:off x="2214720" y="7734960"/>
-            <a:ext cx="1082880" cy="153000"/>
-          </a:xfrm>
-          <a:prstGeom prst="rect">
-            <a:avLst/>
-          </a:prstGeom>
-          <a:noFill/>
-          <a:ln w="0">
-            <a:noFill/>
-          </a:ln>
-        </p:spPr>
-        <p:txBody>
-          <a:bodyPr wrap="none" lIns="0" rIns="0" tIns="0" bIns="0" anchor="t">
-            <a:noAutofit/>
-          </a:bodyPr>
-          <a:p>
-            <a:r>
-              <a:rPr b="0" lang="en-US" sz="1000" spc="-1" strike="noStrike">
-                <a:solidFill>
-                  <a:srgbClr val="0e0e14"/>
-                </a:solidFill>
-                <a:latin typeface="Inter"/>
-                <a:ea typeface="Inter"/>
-              </a:rPr>
-              <a:t>Omer Bin Dawood</a:t>
-            </a:r>
-            <a:endParaRPr b="0" lang="en-US" sz="1000" spc="-1" strike="noStrike">
-              <a:solidFill>
-                <a:srgbClr val="000000"/>
-              </a:solidFill>
-              <a:latin typeface="Times New Roman"/>
-            </a:endParaRPr>
-          </a:p>
-        </p:txBody>
-      </p:sp>
-      <p:sp>
-        <p:nvSpPr>
-          <p:cNvPr id="78" name=""/>
-          <p:cNvSpPr/>
-          <p:nvPr/>
-        </p:nvSpPr>
-        <p:spPr>
-          <a:xfrm>
-            <a:off x="3962160" y="8029440"/>
-            <a:ext cx="1391040" cy="9720"/>
-          </a:xfrm>
-          <a:custGeom>
-            <a:avLst/>
-            <a:gdLst/>
-            <a:ahLst/>
-            <a:rect l="0" t="0" r="r" b="b"/>
-            <a:pathLst>
-              <a:path w="3864" h="27">
-                <a:moveTo>
-                  <a:pt x="0" y="0"/>
-                </a:moveTo>
-                <a:lnTo>
-                  <a:pt x="3864" y="0"/>
-                </a:lnTo>
-                <a:lnTo>
-                  <a:pt x="3864" y="27"/>
-                </a:lnTo>
-                <a:lnTo>
-                  <a:pt x="0" y="27"/>
-                </a:lnTo>
-                <a:lnTo>
-                  <a:pt x="0" y="0"/>
-                </a:lnTo>
-                <a:close/>
-              </a:path>
-            </a:pathLst>
-          </a:custGeom>
-          <a:solidFill>
-            <a:srgbClr val="bdb5b7"/>
-          </a:solidFill>
-          <a:ln w="0">
-            <a:noFill/>
-          </a:ln>
-        </p:spPr>
-        <p:txBody>
-          <a:bodyPr lIns="0" rIns="0" tIns="0" bIns="0" anchor="t">
-            <a:noAutofit/>
-          </a:bodyPr>
-          <a:p>
-            <a:endParaRPr b="0" lang="en-US" sz="2400" spc="-1" strike="noStrike">
-              <a:solidFill>
-                <a:srgbClr val="000000"/>
-              </a:solidFill>
-              <a:latin typeface="Times New Roman"/>
-            </a:endParaRPr>
-          </a:p>
-        </p:txBody>
-      </p:sp>
-      <p:sp>
-        <p:nvSpPr>
-          <p:cNvPr id="79" name=""/>
-          <p:cNvSpPr txBox="1"/>
-          <p:nvPr/>
-        </p:nvSpPr>
-        <p:spPr>
-          <a:xfrm>
-            <a:off x="3961440" y="7337520"/>
-            <a:ext cx="777960" cy="104040"/>
-          </a:xfrm>
-          <a:prstGeom prst="rect">
-            <a:avLst/>
-          </a:prstGeom>
-          <a:noFill/>
-          <a:ln w="0">
-            <a:noFill/>
-          </a:ln>
-        </p:spPr>
-        <p:txBody>
-          <a:bodyPr wrap="none" lIns="0" rIns="0" tIns="0" bIns="0" anchor="t">
-            <a:noAutofit/>
-          </a:bodyPr>
-          <a:p>
-            <a:r>
-              <a:rPr b="1" lang="en-US" sz="700" spc="-1" strike="noStrike">
-                <a:solidFill>
-                  <a:srgbClr val="6a26d8"/>
-                </a:solidFill>
-                <a:latin typeface="Inter-Semi"/>
-                <a:ea typeface="Inter-Semi"/>
-              </a:rPr>
-              <a:t>F O R   G F X - T</a:t>
-            </a:r>
-            <a:endParaRPr b="0" lang="en-US" sz="700" spc="-1" strike="noStrike">
-              <a:solidFill>
-                <a:srgbClr val="000000"/>
-              </a:solidFill>
-              <a:latin typeface="Times New Roman"/>
-            </a:endParaRPr>
-          </a:p>
-        </p:txBody>
-      </p:sp>
-      <p:sp>
-        <p:nvSpPr>
-          <p:cNvPr id="80" name=""/>
-          <p:cNvSpPr/>
-          <p:nvPr/>
-        </p:nvSpPr>
-        <p:spPr>
-          <a:xfrm>
-            <a:off x="5524200" y="8029440"/>
-            <a:ext cx="1391040" cy="9720"/>
-          </a:xfrm>
-          <a:custGeom>
-            <a:avLst/>
-            <a:gdLst/>
-            <a:ahLst/>
-            <a:rect l="0" t="0" r="r" b="b"/>
-            <a:pathLst>
-              <a:path w="3864" h="27">
-                <a:moveTo>
-                  <a:pt x="0" y="0"/>
-                </a:moveTo>
-                <a:lnTo>
-                  <a:pt x="3864" y="0"/>
-                </a:lnTo>
-                <a:lnTo>
-                  <a:pt x="3864" y="27"/>
-                </a:lnTo>
-                <a:lnTo>
-                  <a:pt x="0" y="27"/>
-                </a:lnTo>
-                <a:lnTo>
-                  <a:pt x="0" y="0"/>
-                </a:lnTo>
-                <a:close/>
-              </a:path>
-            </a:pathLst>
-          </a:custGeom>
-          <a:solidFill>
-            <a:srgbClr val="bdb5b7"/>
-          </a:solidFill>
-          <a:ln w="0">
-            <a:noFill/>
-          </a:ln>
-        </p:spPr>
-        <p:txBody>
-          <a:bodyPr lIns="0" rIns="0" tIns="0" bIns="0" anchor="t">
-            <a:noAutofit/>
-          </a:bodyPr>
-          <a:p>
-            <a:endParaRPr b="0" lang="en-US" sz="2400" spc="-1" strike="noStrike">
-              <a:solidFill>
-                <a:srgbClr val="000000"/>
-              </a:solidFill>
-              <a:latin typeface="Times New Roman"/>
-            </a:endParaRPr>
-          </a:p>
-        </p:txBody>
-      </p:sp>
-      <p:sp>
-        <p:nvSpPr>
-          <p:cNvPr id="81" name=""/>
-          <p:cNvSpPr txBox="1"/>
-          <p:nvPr/>
-        </p:nvSpPr>
-        <p:spPr>
-          <a:xfrm>
-            <a:off x="3961440" y="7520760"/>
-            <a:ext cx="773280" cy="100800"/>
-          </a:xfrm>
-          <a:prstGeom prst="rect">
-            <a:avLst/>
-          </a:prstGeom>
-          <a:noFill/>
-          <a:ln w="0">
-            <a:noFill/>
-          </a:ln>
-        </p:spPr>
-        <p:txBody>
-          <a:bodyPr wrap="none" lIns="0" rIns="0" tIns="0" bIns="0" anchor="t">
-            <a:noAutofit/>
-          </a:bodyPr>
-          <a:p>
-            <a:r>
-              <a:rPr b="1" lang="en-US" sz="680" spc="-1" strike="noStrike">
-                <a:solidFill>
-                  <a:srgbClr val="6b6878"/>
-                </a:solidFill>
-                <a:latin typeface="Inter-Semi"/>
-                <a:ea typeface="Inter-Semi"/>
-              </a:rPr>
-              <a:t>S I G N AT U R E</a:t>
-            </a:r>
-            <a:endParaRPr b="0" lang="en-US" sz="680" spc="-1" strike="noStrike">
-              <a:solidFill>
-                <a:srgbClr val="000000"/>
-              </a:solidFill>
-              <a:latin typeface="Times New Roman"/>
-            </a:endParaRPr>
-          </a:p>
-        </p:txBody>
-      </p:sp>
-      <p:sp>
-        <p:nvSpPr>
-          <p:cNvPr id="82" name=""/>
-          <p:cNvSpPr/>
-          <p:nvPr/>
-        </p:nvSpPr>
-        <p:spPr>
-          <a:xfrm>
-            <a:off x="647640" y="1695240"/>
-            <a:ext cx="6267600" cy="10080"/>
-          </a:xfrm>
-          <a:custGeom>
-            <a:avLst/>
-            <a:gdLst/>
-            <a:ahLst/>
-            <a:rect l="0" t="0" r="r" b="b"/>
-            <a:pathLst>
-              <a:path w="17410" h="28">
-                <a:moveTo>
-                  <a:pt x="0" y="0"/>
-                </a:moveTo>
-                <a:lnTo>
-                  <a:pt x="17410" y="0"/>
-                </a:lnTo>
-                <a:lnTo>
-                  <a:pt x="17410" y="28"/>
-                </a:lnTo>
-                <a:lnTo>
-                  <a:pt x="0" y="28"/>
-                </a:lnTo>
-                <a:lnTo>
-                  <a:pt x="0" y="0"/>
-                </a:lnTo>
-                <a:close/>
-              </a:path>
-            </a:pathLst>
-          </a:custGeom>
-          <a:solidFill>
-            <a:srgbClr val="e6e1f0"/>
-          </a:solidFill>
-          <a:ln w="0">
-            <a:noFill/>
-          </a:ln>
-        </p:spPr>
-        <p:txBody>
-          <a:bodyPr lIns="0" rIns="0" tIns="0" bIns="0" anchor="t">
-            <a:noAutofit/>
-          </a:bodyPr>
-          <a:p>
-            <a:endParaRPr b="0" lang="en-US" sz="2400" spc="-1" strike="noStrike">
-              <a:solidFill>
-                <a:srgbClr val="000000"/>
-              </a:solidFill>
-              <a:latin typeface="Times New Roman"/>
-            </a:endParaRPr>
-          </a:p>
-        </p:txBody>
-      </p:sp>
-      <p:pic>
-        <p:nvPicPr>
-          <p:cNvPr id="83" name="" descr=""/>
-          <p:cNvPicPr/>
-          <p:nvPr/>
-        </p:nvPicPr>
-        <p:blipFill>
-          <a:blip r:embed="rId1"/>
-          <a:stretch/>
-        </p:blipFill>
-        <p:spPr>
-          <a:xfrm>
-            <a:off x="647640" y="504720"/>
-            <a:ext cx="409320" cy="399600"/>
-          </a:xfrm>
-          <a:prstGeom prst="rect">
-            <a:avLst/>
-          </a:prstGeom>
-          <a:ln w="0">
-            <a:noFill/>
-          </a:ln>
-        </p:spPr>
-      </p:pic>
-      <p:sp>
-        <p:nvSpPr>
-          <p:cNvPr id="84" name=""/>
-          <p:cNvSpPr txBox="1"/>
-          <p:nvPr/>
-        </p:nvSpPr>
-        <p:spPr>
-          <a:xfrm>
-            <a:off x="5528160" y="7520760"/>
-            <a:ext cx="878400" cy="100800"/>
-          </a:xfrm>
-          <a:prstGeom prst="rect">
-            <a:avLst/>
-          </a:prstGeom>
-          <a:noFill/>
-          <a:ln w="0">
-            <a:noFill/>
-          </a:ln>
-        </p:spPr>
-        <p:txBody>
-          <a:bodyPr wrap="none" lIns="0" rIns="0" tIns="0" bIns="0" anchor="t">
-            <a:noAutofit/>
-          </a:bodyPr>
-          <a:p>
-            <a:r>
-              <a:rPr b="1" lang="en-US" sz="680" spc="-1" strike="noStrike">
-                <a:solidFill>
-                  <a:srgbClr val="6b6878"/>
-                </a:solidFill>
-                <a:latin typeface="Inter-Semi"/>
-                <a:ea typeface="Inter-Semi"/>
-              </a:rPr>
-              <a:t>N A M E   ·   DAT E</a:t>
-            </a:r>
-            <a:endParaRPr b="0" lang="en-US" sz="680" spc="-1" strike="noStrike">
-              <a:solidFill>
-                <a:srgbClr val="000000"/>
-              </a:solidFill>
-              <a:latin typeface="Times New Roman"/>
-            </a:endParaRPr>
-          </a:p>
-        </p:txBody>
-      </p:sp>
-      <p:sp>
-        <p:nvSpPr>
-          <p:cNvPr id="85" name=""/>
+          <p:cNvPr id="91" name=""/>
           <p:cNvSpPr txBox="1"/>
           <p:nvPr/>
         </p:nvSpPr>
@@ -5008,7 +5296,7 @@
       </p:sp>
       <p:sp>
         <p:nvSpPr>
-          <p:cNvPr id="86" name=""/>
+          <p:cNvPr id="92" name=""/>
           <p:cNvSpPr txBox="1"/>
           <p:nvPr/>
         </p:nvSpPr>
@@ -5051,7 +5339,7 @@
       </p:sp>
       <p:sp>
         <p:nvSpPr>
-          <p:cNvPr id="87" name=""/>
+          <p:cNvPr id="93" name=""/>
           <p:cNvSpPr txBox="1"/>
           <p:nvPr/>
         </p:nvSpPr>
@@ -5094,7 +5382,7 @@
       </p:sp>
       <p:sp>
         <p:nvSpPr>
-          <p:cNvPr id="88" name=""/>
+          <p:cNvPr id="94" name=""/>
           <p:cNvSpPr txBox="1"/>
           <p:nvPr/>
         </p:nvSpPr>
@@ -5137,7 +5425,7 @@
       </p:sp>
       <p:sp>
         <p:nvSpPr>
-          <p:cNvPr id="89" name=""/>
+          <p:cNvPr id="95" name=""/>
           <p:cNvSpPr txBox="1"/>
           <p:nvPr/>
         </p:nvSpPr>
@@ -5180,7 +5468,7 @@
       </p:sp>
       <p:sp>
         <p:nvSpPr>
-          <p:cNvPr id="90" name=""/>
+          <p:cNvPr id="96" name=""/>
           <p:cNvSpPr txBox="1"/>
           <p:nvPr/>
         </p:nvSpPr>
@@ -5223,7 +5511,7 @@
       </p:sp>
       <p:sp>
         <p:nvSpPr>
-          <p:cNvPr id="91" name=""/>
+          <p:cNvPr id="97" name=""/>
           <p:cNvSpPr txBox="1"/>
           <p:nvPr/>
         </p:nvSpPr>
@@ -5266,7 +5554,7 @@
       </p:sp>
       <p:sp>
         <p:nvSpPr>
-          <p:cNvPr id="92" name=""/>
+          <p:cNvPr id="98" name=""/>
           <p:cNvSpPr txBox="1"/>
           <p:nvPr/>
         </p:nvSpPr>
@@ -5309,7 +5597,7 @@
       </p:sp>
       <p:sp>
         <p:nvSpPr>
-          <p:cNvPr id="93" name=""/>
+          <p:cNvPr id="99" name=""/>
           <p:cNvSpPr/>
           <p:nvPr/>
         </p:nvSpPr>
@@ -5364,7 +5652,7 @@
       </p:sp>
       <p:sp>
         <p:nvSpPr>
-          <p:cNvPr id="94" name=""/>
+          <p:cNvPr id="100" name=""/>
           <p:cNvSpPr/>
           <p:nvPr/>
         </p:nvSpPr>
@@ -5422,7 +5710,7 @@
       </p:sp>
       <p:sp>
         <p:nvSpPr>
-          <p:cNvPr id="95" name=""/>
+          <p:cNvPr id="101" name=""/>
           <p:cNvSpPr/>
           <p:nvPr/>
         </p:nvSpPr>
@@ -5480,7 +5768,7 @@
       </p:sp>
       <p:sp>
         <p:nvSpPr>
-          <p:cNvPr id="96" name=""/>
+          <p:cNvPr id="102" name=""/>
           <p:cNvSpPr/>
           <p:nvPr/>
         </p:nvSpPr>
@@ -5538,7 +5826,7 @@
       </p:sp>
       <p:sp>
         <p:nvSpPr>
-          <p:cNvPr id="97" name=""/>
+          <p:cNvPr id="103" name=""/>
           <p:cNvSpPr/>
           <p:nvPr/>
         </p:nvSpPr>
@@ -5596,7 +5884,7 @@
       </p:sp>
       <p:sp>
         <p:nvSpPr>
-          <p:cNvPr id="98" name=""/>
+          <p:cNvPr id="104" name=""/>
           <p:cNvSpPr/>
           <p:nvPr/>
         </p:nvSpPr>
@@ -5654,7 +5942,7 @@
       </p:sp>
       <p:sp>
         <p:nvSpPr>
-          <p:cNvPr id="99" name=""/>
+          <p:cNvPr id="105" name=""/>
           <p:cNvSpPr/>
           <p:nvPr/>
         </p:nvSpPr>
@@ -5712,7 +6000,7 @@
       </p:sp>
       <p:sp>
         <p:nvSpPr>
-          <p:cNvPr id="100" name=""/>
+          <p:cNvPr id="106" name=""/>
           <p:cNvSpPr/>
           <p:nvPr/>
         </p:nvSpPr>
@@ -5770,7 +6058,7 @@
       </p:sp>
       <p:sp>
         <p:nvSpPr>
-          <p:cNvPr id="101" name=""/>
+          <p:cNvPr id="107" name=""/>
           <p:cNvSpPr/>
           <p:nvPr/>
         </p:nvSpPr>
@@ -5828,7 +6116,7 @@
       </p:sp>
       <p:sp>
         <p:nvSpPr>
-          <p:cNvPr id="102" name=""/>
+          <p:cNvPr id="108" name=""/>
           <p:cNvSpPr/>
           <p:nvPr/>
         </p:nvSpPr>
@@ -5886,7 +6174,7 @@
       </p:sp>
       <p:sp>
         <p:nvSpPr>
-          <p:cNvPr id="103" name=""/>
+          <p:cNvPr id="109" name=""/>
           <p:cNvSpPr/>
           <p:nvPr/>
         </p:nvSpPr>
@@ -5944,7 +6232,7 @@
       </p:sp>
       <p:sp>
         <p:nvSpPr>
-          <p:cNvPr id="104" name=""/>
+          <p:cNvPr id="110" name=""/>
           <p:cNvSpPr/>
           <p:nvPr/>
         </p:nvSpPr>
@@ -6002,7 +6290,7 @@
       </p:sp>
       <p:sp>
         <p:nvSpPr>
-          <p:cNvPr id="105" name=""/>
+          <p:cNvPr id="111" name=""/>
           <p:cNvSpPr/>
           <p:nvPr/>
         </p:nvSpPr>
@@ -6060,7 +6348,7 @@
       </p:sp>
       <p:sp>
         <p:nvSpPr>
-          <p:cNvPr id="106" name=""/>
+          <p:cNvPr id="112" name=""/>
           <p:cNvSpPr/>
           <p:nvPr/>
         </p:nvSpPr>
@@ -6118,7 +6406,7 @@
       </p:sp>
       <p:sp>
         <p:nvSpPr>
-          <p:cNvPr id="107" name=""/>
+          <p:cNvPr id="113" name=""/>
           <p:cNvSpPr/>
           <p:nvPr/>
         </p:nvSpPr>
@@ -6176,7 +6464,7 @@
       </p:sp>
       <p:sp>
         <p:nvSpPr>
-          <p:cNvPr id="108" name=""/>
+          <p:cNvPr id="114" name=""/>
           <p:cNvSpPr/>
           <p:nvPr/>
         </p:nvSpPr>
@@ -6234,7 +6522,7 @@
       </p:sp>
       <p:sp>
         <p:nvSpPr>
-          <p:cNvPr id="109" name=""/>
+          <p:cNvPr id="115" name=""/>
           <p:cNvSpPr/>
           <p:nvPr/>
         </p:nvSpPr>
@@ -6292,7 +6580,7 @@
       </p:sp>
       <p:sp>
         <p:nvSpPr>
-          <p:cNvPr id="110" name=""/>
+          <p:cNvPr id="116" name=""/>
           <p:cNvSpPr/>
           <p:nvPr/>
         </p:nvSpPr>
@@ -6350,7 +6638,7 @@
       </p:sp>
       <p:sp>
         <p:nvSpPr>
-          <p:cNvPr id="111" name=""/>
+          <p:cNvPr id="117" name=""/>
           <p:cNvSpPr/>
           <p:nvPr/>
         </p:nvSpPr>
@@ -6408,7 +6696,7 @@
       </p:sp>
       <p:sp>
         <p:nvSpPr>
-          <p:cNvPr id="112" name=""/>
+          <p:cNvPr id="118" name=""/>
           <p:cNvSpPr/>
           <p:nvPr/>
         </p:nvSpPr>
@@ -6466,7 +6754,7 @@
       </p:sp>
       <p:sp>
         <p:nvSpPr>
-          <p:cNvPr id="113" name=""/>
+          <p:cNvPr id="119" name=""/>
           <p:cNvSpPr/>
           <p:nvPr/>
         </p:nvSpPr>
@@ -6524,7 +6812,7 @@
       </p:sp>
       <p:sp>
         <p:nvSpPr>
-          <p:cNvPr id="114" name=""/>
+          <p:cNvPr id="120" name=""/>
           <p:cNvSpPr/>
           <p:nvPr/>
         </p:nvSpPr>
@@ -6582,7 +6870,7 @@
       </p:sp>
       <p:sp>
         <p:nvSpPr>
-          <p:cNvPr id="115" name=""/>
+          <p:cNvPr id="121" name=""/>
           <p:cNvSpPr/>
           <p:nvPr/>
         </p:nvSpPr>
@@ -6640,7 +6928,7 @@
       </p:sp>
       <p:sp>
         <p:nvSpPr>
-          <p:cNvPr id="116" name=""/>
+          <p:cNvPr id="122" name=""/>
           <p:cNvSpPr/>
           <p:nvPr/>
         </p:nvSpPr>
@@ -6698,7 +6986,7 @@
       </p:sp>
       <p:sp>
         <p:nvSpPr>
-          <p:cNvPr id="117" name=""/>
+          <p:cNvPr id="123" name=""/>
           <p:cNvSpPr/>
           <p:nvPr/>
         </p:nvSpPr>
@@ -6756,7 +7044,7 @@
       </p:sp>
       <p:sp>
         <p:nvSpPr>
-          <p:cNvPr id="118" name=""/>
+          <p:cNvPr id="124" name=""/>
           <p:cNvSpPr/>
           <p:nvPr/>
         </p:nvSpPr>
@@ -6814,7 +7102,7 @@
       </p:sp>
       <p:sp>
         <p:nvSpPr>
-          <p:cNvPr id="119" name=""/>
+          <p:cNvPr id="125" name=""/>
           <p:cNvSpPr/>
           <p:nvPr/>
         </p:nvSpPr>
@@ -6872,7 +7160,7 @@
       </p:sp>
       <p:sp>
         <p:nvSpPr>
-          <p:cNvPr id="120" name=""/>
+          <p:cNvPr id="126" name=""/>
           <p:cNvSpPr/>
           <p:nvPr/>
         </p:nvSpPr>
@@ -6930,7 +7218,7 @@
       </p:sp>
       <p:sp>
         <p:nvSpPr>
-          <p:cNvPr id="121" name=""/>
+          <p:cNvPr id="127" name=""/>
           <p:cNvSpPr/>
           <p:nvPr/>
         </p:nvSpPr>
@@ -6988,7 +7276,7 @@
       </p:sp>
       <p:sp>
         <p:nvSpPr>
-          <p:cNvPr id="122" name=""/>
+          <p:cNvPr id="128" name=""/>
           <p:cNvSpPr/>
           <p:nvPr/>
         </p:nvSpPr>
@@ -7046,7 +7334,7 @@
       </p:sp>
       <p:sp>
         <p:nvSpPr>
-          <p:cNvPr id="123" name=""/>
+          <p:cNvPr id="129" name=""/>
           <p:cNvSpPr/>
           <p:nvPr/>
         </p:nvSpPr>
@@ -7104,7 +7392,7 @@
       </p:sp>
       <p:sp>
         <p:nvSpPr>
-          <p:cNvPr id="124" name=""/>
+          <p:cNvPr id="130" name=""/>
           <p:cNvSpPr/>
           <p:nvPr/>
         </p:nvSpPr>
@@ -7162,7 +7450,7 @@
       </p:sp>
       <p:sp>
         <p:nvSpPr>
-          <p:cNvPr id="125" name=""/>
+          <p:cNvPr id="131" name=""/>
           <p:cNvSpPr/>
           <p:nvPr/>
         </p:nvSpPr>
@@ -7220,7 +7508,7 @@
       </p:sp>
       <p:sp>
         <p:nvSpPr>
-          <p:cNvPr id="126" name=""/>
+          <p:cNvPr id="132" name=""/>
           <p:cNvSpPr/>
           <p:nvPr/>
         </p:nvSpPr>
@@ -7278,7 +7566,7 @@
       </p:sp>
       <p:sp>
         <p:nvSpPr>
-          <p:cNvPr id="127" name=""/>
+          <p:cNvPr id="133" name=""/>
           <p:cNvSpPr/>
           <p:nvPr/>
         </p:nvSpPr>
@@ -7336,7 +7624,7 @@
       </p:sp>
       <p:sp>
         <p:nvSpPr>
-          <p:cNvPr id="128" name=""/>
+          <p:cNvPr id="134" name=""/>
           <p:cNvSpPr/>
           <p:nvPr/>
         </p:nvSpPr>
@@ -7394,7 +7682,7 @@
       </p:sp>
       <p:sp>
         <p:nvSpPr>
-          <p:cNvPr id="129" name=""/>
+          <p:cNvPr id="135" name=""/>
           <p:cNvSpPr/>
           <p:nvPr/>
         </p:nvSpPr>
@@ -7452,7 +7740,7 @@
       </p:sp>
       <p:sp>
         <p:nvSpPr>
-          <p:cNvPr id="130" name=""/>
+          <p:cNvPr id="136" name=""/>
           <p:cNvSpPr/>
           <p:nvPr/>
         </p:nvSpPr>
@@ -7510,7 +7798,7 @@
       </p:sp>
       <p:sp>
         <p:nvSpPr>
-          <p:cNvPr id="131" name=""/>
+          <p:cNvPr id="137" name=""/>
           <p:cNvSpPr/>
           <p:nvPr/>
         </p:nvSpPr>
@@ -7568,7 +7856,7 @@
       </p:sp>
       <p:sp>
         <p:nvSpPr>
-          <p:cNvPr id="132" name=""/>
+          <p:cNvPr id="138" name=""/>
           <p:cNvSpPr/>
           <p:nvPr/>
         </p:nvSpPr>
@@ -7626,7 +7914,7 @@
       </p:sp>
       <p:sp>
         <p:nvSpPr>
-          <p:cNvPr id="133" name=""/>
+          <p:cNvPr id="139" name=""/>
           <p:cNvSpPr/>
           <p:nvPr/>
         </p:nvSpPr>
@@ -7684,7 +7972,7 @@
       </p:sp>
       <p:sp>
         <p:nvSpPr>
-          <p:cNvPr id="134" name=""/>
+          <p:cNvPr id="140" name=""/>
           <p:cNvSpPr/>
           <p:nvPr/>
         </p:nvSpPr>
@@ -7742,7 +8030,7 @@
       </p:sp>
       <p:sp>
         <p:nvSpPr>
-          <p:cNvPr id="135" name=""/>
+          <p:cNvPr id="141" name=""/>
           <p:cNvSpPr/>
           <p:nvPr/>
         </p:nvSpPr>
@@ -7800,7 +8088,7 @@
       </p:sp>
       <p:sp>
         <p:nvSpPr>
-          <p:cNvPr id="136" name=""/>
+          <p:cNvPr id="142" name=""/>
           <p:cNvSpPr/>
           <p:nvPr/>
         </p:nvSpPr>
@@ -7858,7 +8146,7 @@
       </p:sp>
       <p:sp>
         <p:nvSpPr>
-          <p:cNvPr id="137" name=""/>
+          <p:cNvPr id="143" name=""/>
           <p:cNvSpPr/>
           <p:nvPr/>
         </p:nvSpPr>
@@ -7916,7 +8204,7 @@
       </p:sp>
       <p:sp>
         <p:nvSpPr>
-          <p:cNvPr id="138" name=""/>
+          <p:cNvPr id="144" name=""/>
           <p:cNvSpPr/>
           <p:nvPr/>
         </p:nvSpPr>
@@ -7974,7 +8262,7 @@
       </p:sp>
       <p:sp>
         <p:nvSpPr>
-          <p:cNvPr id="139" name=""/>
+          <p:cNvPr id="145" name=""/>
           <p:cNvSpPr/>
           <p:nvPr/>
         </p:nvSpPr>
@@ -8032,7 +8320,7 @@
       </p:sp>
       <p:sp>
         <p:nvSpPr>
-          <p:cNvPr id="140" name=""/>
+          <p:cNvPr id="146" name=""/>
           <p:cNvSpPr/>
           <p:nvPr/>
         </p:nvSpPr>
@@ -8090,7 +8378,7 @@
       </p:sp>
       <p:sp>
         <p:nvSpPr>
-          <p:cNvPr id="141" name=""/>
+          <p:cNvPr id="147" name=""/>
           <p:cNvSpPr/>
           <p:nvPr/>
         </p:nvSpPr>
@@ -8148,7 +8436,7 @@
       </p:sp>
       <p:sp>
         <p:nvSpPr>
-          <p:cNvPr id="142" name=""/>
+          <p:cNvPr id="148" name=""/>
           <p:cNvSpPr/>
           <p:nvPr/>
         </p:nvSpPr>
@@ -8206,7 +8494,7 @@
       </p:sp>
       <p:sp>
         <p:nvSpPr>
-          <p:cNvPr id="143" name=""/>
+          <p:cNvPr id="149" name=""/>
           <p:cNvSpPr/>
           <p:nvPr/>
         </p:nvSpPr>
@@ -8264,7 +8552,7 @@
       </p:sp>
       <p:sp>
         <p:nvSpPr>
-          <p:cNvPr id="144" name=""/>
+          <p:cNvPr id="150" name=""/>
           <p:cNvSpPr/>
           <p:nvPr/>
         </p:nvSpPr>
@@ -8322,7 +8610,7 @@
       </p:sp>
       <p:sp>
         <p:nvSpPr>
-          <p:cNvPr id="145" name=""/>
+          <p:cNvPr id="151" name=""/>
           <p:cNvSpPr/>
           <p:nvPr/>
         </p:nvSpPr>
@@ -8380,7 +8668,7 @@
       </p:sp>
       <p:sp>
         <p:nvSpPr>
-          <p:cNvPr id="146" name=""/>
+          <p:cNvPr id="152" name=""/>
           <p:cNvSpPr/>
           <p:nvPr/>
         </p:nvSpPr>
@@ -8438,7 +8726,7 @@
       </p:sp>
       <p:sp>
         <p:nvSpPr>
-          <p:cNvPr id="147" name=""/>
+          <p:cNvPr id="153" name=""/>
           <p:cNvSpPr/>
           <p:nvPr/>
         </p:nvSpPr>
@@ -8496,7 +8784,7 @@
       </p:sp>
       <p:sp>
         <p:nvSpPr>
-          <p:cNvPr id="148" name=""/>
+          <p:cNvPr id="154" name=""/>
           <p:cNvSpPr/>
           <p:nvPr/>
         </p:nvSpPr>
@@ -8554,7 +8842,7 @@
       </p:sp>
       <p:sp>
         <p:nvSpPr>
-          <p:cNvPr id="149" name=""/>
+          <p:cNvPr id="155" name=""/>
           <p:cNvSpPr/>
           <p:nvPr/>
         </p:nvSpPr>
@@ -8612,7 +8900,7 @@
       </p:sp>
       <p:sp>
         <p:nvSpPr>
-          <p:cNvPr id="150" name=""/>
+          <p:cNvPr id="156" name=""/>
           <p:cNvSpPr/>
           <p:nvPr/>
         </p:nvSpPr>
@@ -8670,7 +8958,7 @@
       </p:sp>
       <p:sp>
         <p:nvSpPr>
-          <p:cNvPr id="151" name=""/>
+          <p:cNvPr id="157" name=""/>
           <p:cNvSpPr/>
           <p:nvPr/>
         </p:nvSpPr>
@@ -8728,7 +9016,7 @@
       </p:sp>
       <p:sp>
         <p:nvSpPr>
-          <p:cNvPr id="152" name=""/>
+          <p:cNvPr id="158" name=""/>
           <p:cNvSpPr/>
           <p:nvPr/>
         </p:nvSpPr>
@@ -8786,7 +9074,7 @@
       </p:sp>
       <p:sp>
         <p:nvSpPr>
-          <p:cNvPr id="153" name=""/>
+          <p:cNvPr id="159" name=""/>
           <p:cNvSpPr/>
           <p:nvPr/>
         </p:nvSpPr>
@@ -8844,7 +9132,7 @@
       </p:sp>
       <p:sp>
         <p:nvSpPr>
-          <p:cNvPr id="154" name=""/>
+          <p:cNvPr id="160" name=""/>
           <p:cNvSpPr/>
           <p:nvPr/>
         </p:nvSpPr>
@@ -8902,7 +9190,7 @@
       </p:sp>
       <p:sp>
         <p:nvSpPr>
-          <p:cNvPr id="155" name=""/>
+          <p:cNvPr id="161" name=""/>
           <p:cNvSpPr/>
           <p:nvPr/>
         </p:nvSpPr>
@@ -8960,7 +9248,7 @@
       </p:sp>
       <p:sp>
         <p:nvSpPr>
-          <p:cNvPr id="156" name=""/>
+          <p:cNvPr id="162" name=""/>
           <p:cNvSpPr/>
           <p:nvPr/>
         </p:nvSpPr>
@@ -9018,7 +9306,7 @@
       </p:sp>
       <p:sp>
         <p:nvSpPr>
-          <p:cNvPr id="157" name=""/>
+          <p:cNvPr id="163" name=""/>
           <p:cNvSpPr/>
           <p:nvPr/>
         </p:nvSpPr>
@@ -9076,7 +9364,7 @@
       </p:sp>
       <p:sp>
         <p:nvSpPr>
-          <p:cNvPr id="158" name=""/>
+          <p:cNvPr id="164" name=""/>
           <p:cNvSpPr/>
           <p:nvPr/>
         </p:nvSpPr>
@@ -9134,7 +9422,7 @@
       </p:sp>
       <p:sp>
         <p:nvSpPr>
-          <p:cNvPr id="159" name=""/>
+          <p:cNvPr id="165" name=""/>
           <p:cNvSpPr/>
           <p:nvPr/>
         </p:nvSpPr>
@@ -9192,7 +9480,7 @@
       </p:sp>
       <p:sp>
         <p:nvSpPr>
-          <p:cNvPr id="160" name=""/>
+          <p:cNvPr id="166" name=""/>
           <p:cNvSpPr/>
           <p:nvPr/>
         </p:nvSpPr>
@@ -9250,7 +9538,7 @@
       </p:sp>
       <p:sp>
         <p:nvSpPr>
-          <p:cNvPr id="161" name=""/>
+          <p:cNvPr id="167" name=""/>
           <p:cNvSpPr/>
           <p:nvPr/>
         </p:nvSpPr>
@@ -9308,7 +9596,7 @@
       </p:sp>
       <p:sp>
         <p:nvSpPr>
-          <p:cNvPr id="162" name=""/>
+          <p:cNvPr id="168" name=""/>
           <p:cNvSpPr/>
           <p:nvPr/>
         </p:nvSpPr>
@@ -9366,7 +9654,7 @@
       </p:sp>
       <p:sp>
         <p:nvSpPr>
-          <p:cNvPr id="163" name=""/>
+          <p:cNvPr id="169" name=""/>
           <p:cNvSpPr/>
           <p:nvPr/>
         </p:nvSpPr>
@@ -9424,7 +9712,7 @@
       </p:sp>
       <p:sp>
         <p:nvSpPr>
-          <p:cNvPr id="164" name=""/>
+          <p:cNvPr id="170" name=""/>
           <p:cNvSpPr/>
           <p:nvPr/>
         </p:nvSpPr>
@@ -9482,7 +9770,7 @@
       </p:sp>
       <p:sp>
         <p:nvSpPr>
-          <p:cNvPr id="165" name=""/>
+          <p:cNvPr id="171" name=""/>
           <p:cNvSpPr/>
           <p:nvPr/>
         </p:nvSpPr>
@@ -9540,7 +9828,7 @@
       </p:sp>
       <p:sp>
         <p:nvSpPr>
-          <p:cNvPr id="166" name=""/>
+          <p:cNvPr id="172" name=""/>
           <p:cNvSpPr/>
           <p:nvPr/>
         </p:nvSpPr>
@@ -9598,7 +9886,7 @@
       </p:sp>
       <p:sp>
         <p:nvSpPr>
-          <p:cNvPr id="167" name=""/>
+          <p:cNvPr id="173" name=""/>
           <p:cNvSpPr/>
           <p:nvPr/>
         </p:nvSpPr>
@@ -9656,7 +9944,7 @@
       </p:sp>
       <p:sp>
         <p:nvSpPr>
-          <p:cNvPr id="168" name=""/>
+          <p:cNvPr id="174" name=""/>
           <p:cNvSpPr/>
           <p:nvPr/>
         </p:nvSpPr>
@@ -9714,7 +10002,7 @@
       </p:sp>
       <p:sp>
         <p:nvSpPr>
-          <p:cNvPr id="169" name=""/>
+          <p:cNvPr id="175" name=""/>
           <p:cNvSpPr/>
           <p:nvPr/>
         </p:nvSpPr>
@@ -9772,7 +10060,7 @@
       </p:sp>
       <p:sp>
         <p:nvSpPr>
-          <p:cNvPr id="170" name=""/>
+          <p:cNvPr id="176" name=""/>
           <p:cNvSpPr/>
           <p:nvPr/>
         </p:nvSpPr>
@@ -9830,7 +10118,7 @@
       </p:sp>
       <p:sp>
         <p:nvSpPr>
-          <p:cNvPr id="171" name=""/>
+          <p:cNvPr id="177" name=""/>
           <p:cNvSpPr/>
           <p:nvPr/>
         </p:nvSpPr>
@@ -9888,7 +10176,7 @@
       </p:sp>
       <p:sp>
         <p:nvSpPr>
-          <p:cNvPr id="172" name=""/>
+          <p:cNvPr id="178" name=""/>
           <p:cNvSpPr/>
           <p:nvPr/>
         </p:nvSpPr>
@@ -9946,7 +10234,7 @@
       </p:sp>
       <p:sp>
         <p:nvSpPr>
-          <p:cNvPr id="173" name=""/>
+          <p:cNvPr id="179" name=""/>
           <p:cNvSpPr/>
           <p:nvPr/>
         </p:nvSpPr>
@@ -10004,7 +10292,7 @@
       </p:sp>
       <p:sp>
         <p:nvSpPr>
-          <p:cNvPr id="174" name=""/>
+          <p:cNvPr id="180" name=""/>
           <p:cNvSpPr/>
           <p:nvPr/>
         </p:nvSpPr>
@@ -10062,7 +10350,7 @@
       </p:sp>
       <p:sp>
         <p:nvSpPr>
-          <p:cNvPr id="175" name=""/>
+          <p:cNvPr id="181" name=""/>
           <p:cNvSpPr/>
           <p:nvPr/>
         </p:nvSpPr>
@@ -10120,7 +10408,7 @@
       </p:sp>
       <p:sp>
         <p:nvSpPr>
-          <p:cNvPr id="176" name=""/>
+          <p:cNvPr id="182" name=""/>
           <p:cNvSpPr/>
           <p:nvPr/>
         </p:nvSpPr>
@@ -10178,7 +10466,7 @@
       </p:sp>
       <p:sp>
         <p:nvSpPr>
-          <p:cNvPr id="177" name=""/>
+          <p:cNvPr id="183" name=""/>
           <p:cNvSpPr/>
           <p:nvPr/>
         </p:nvSpPr>
@@ -10236,7 +10524,7 @@
       </p:sp>
       <p:sp>
         <p:nvSpPr>
-          <p:cNvPr id="178" name=""/>
+          <p:cNvPr id="184" name=""/>
           <p:cNvSpPr/>
           <p:nvPr/>
         </p:nvSpPr>
@@ -10294,7 +10582,7 @@
       </p:sp>
       <p:sp>
         <p:nvSpPr>
-          <p:cNvPr id="179" name=""/>
+          <p:cNvPr id="185" name=""/>
           <p:cNvSpPr/>
           <p:nvPr/>
         </p:nvSpPr>
@@ -10352,7 +10640,7 @@
       </p:sp>
       <p:sp>
         <p:nvSpPr>
-          <p:cNvPr id="180" name=""/>
+          <p:cNvPr id="186" name=""/>
           <p:cNvSpPr/>
           <p:nvPr/>
         </p:nvSpPr>
@@ -10410,7 +10698,7 @@
       </p:sp>
       <p:sp>
         <p:nvSpPr>
-          <p:cNvPr id="181" name=""/>
+          <p:cNvPr id="187" name=""/>
           <p:cNvSpPr/>
           <p:nvPr/>
         </p:nvSpPr>
@@ -10468,7 +10756,7 @@
       </p:sp>
       <p:sp>
         <p:nvSpPr>
-          <p:cNvPr id="182" name=""/>
+          <p:cNvPr id="188" name=""/>
           <p:cNvSpPr/>
           <p:nvPr/>
         </p:nvSpPr>
@@ -10526,7 +10814,7 @@
       </p:sp>
       <p:sp>
         <p:nvSpPr>
-          <p:cNvPr id="183" name=""/>
+          <p:cNvPr id="189" name=""/>
           <p:cNvSpPr/>
           <p:nvPr/>
         </p:nvSpPr>
@@ -10584,7 +10872,7 @@
       </p:sp>
       <p:sp>
         <p:nvSpPr>
-          <p:cNvPr id="184" name=""/>
+          <p:cNvPr id="190" name=""/>
           <p:cNvSpPr/>
           <p:nvPr/>
         </p:nvSpPr>
@@ -10642,7 +10930,7 @@
       </p:sp>
       <p:sp>
         <p:nvSpPr>
-          <p:cNvPr id="185" name=""/>
+          <p:cNvPr id="191" name=""/>
           <p:cNvSpPr/>
           <p:nvPr/>
         </p:nvSpPr>
@@ -10700,7 +10988,7 @@
       </p:sp>
       <p:sp>
         <p:nvSpPr>
-          <p:cNvPr id="186" name=""/>
+          <p:cNvPr id="192" name=""/>
           <p:cNvSpPr/>
           <p:nvPr/>
         </p:nvSpPr>
@@ -10758,7 +11046,7 @@
       </p:sp>
       <p:sp>
         <p:nvSpPr>
-          <p:cNvPr id="187" name=""/>
+          <p:cNvPr id="193" name=""/>
           <p:cNvSpPr/>
           <p:nvPr/>
         </p:nvSpPr>
@@ -10816,7 +11104,7 @@
       </p:sp>
       <p:sp>
         <p:nvSpPr>
-          <p:cNvPr id="188" name=""/>
+          <p:cNvPr id="194" name=""/>
           <p:cNvSpPr/>
           <p:nvPr/>
         </p:nvSpPr>
@@ -10874,7 +11162,7 @@
       </p:sp>
       <p:sp>
         <p:nvSpPr>
-          <p:cNvPr id="189" name=""/>
+          <p:cNvPr id="195" name=""/>
           <p:cNvSpPr/>
           <p:nvPr/>
         </p:nvSpPr>
@@ -10932,7 +11220,7 @@
       </p:sp>
       <p:sp>
         <p:nvSpPr>
-          <p:cNvPr id="190" name=""/>
+          <p:cNvPr id="196" name=""/>
           <p:cNvSpPr/>
           <p:nvPr/>
         </p:nvSpPr>
@@ -10990,7 +11278,7 @@
       </p:sp>
       <p:sp>
         <p:nvSpPr>
-          <p:cNvPr id="191" name=""/>
+          <p:cNvPr id="197" name=""/>
           <p:cNvSpPr/>
           <p:nvPr/>
         </p:nvSpPr>
@@ -11048,7 +11336,7 @@
       </p:sp>
       <p:sp>
         <p:nvSpPr>
-          <p:cNvPr id="192" name=""/>
+          <p:cNvPr id="198" name=""/>
           <p:cNvSpPr/>
           <p:nvPr/>
         </p:nvSpPr>
@@ -11106,7 +11394,7 @@
       </p:sp>
       <p:sp>
         <p:nvSpPr>
-          <p:cNvPr id="193" name=""/>
+          <p:cNvPr id="199" name=""/>
           <p:cNvSpPr/>
           <p:nvPr/>
         </p:nvSpPr>
@@ -11164,7 +11452,7 @@
       </p:sp>
       <p:sp>
         <p:nvSpPr>
-          <p:cNvPr id="194" name=""/>
+          <p:cNvPr id="200" name=""/>
           <p:cNvSpPr/>
           <p:nvPr/>
         </p:nvSpPr>
@@ -11222,7 +11510,7 @@
       </p:sp>
       <p:sp>
         <p:nvSpPr>
-          <p:cNvPr id="195" name=""/>
+          <p:cNvPr id="201" name=""/>
           <p:cNvSpPr/>
           <p:nvPr/>
         </p:nvSpPr>
@@ -11280,7 +11568,7 @@
       </p:sp>
       <p:sp>
         <p:nvSpPr>
-          <p:cNvPr id="196" name=""/>
+          <p:cNvPr id="202" name=""/>
           <p:cNvSpPr/>
           <p:nvPr/>
         </p:nvSpPr>
@@ -11338,7 +11626,7 @@
       </p:sp>
       <p:sp>
         <p:nvSpPr>
-          <p:cNvPr id="197" name=""/>
+          <p:cNvPr id="203" name=""/>
           <p:cNvSpPr/>
           <p:nvPr/>
         </p:nvSpPr>
@@ -11396,7 +11684,7 @@
       </p:sp>
       <p:sp>
         <p:nvSpPr>
-          <p:cNvPr id="198" name=""/>
+          <p:cNvPr id="204" name=""/>
           <p:cNvSpPr/>
           <p:nvPr/>
         </p:nvSpPr>
@@ -11454,7 +11742,7 @@
       </p:sp>
       <p:sp>
         <p:nvSpPr>
-          <p:cNvPr id="199" name=""/>
+          <p:cNvPr id="205" name=""/>
           <p:cNvSpPr/>
           <p:nvPr/>
         </p:nvSpPr>
@@ -11512,7 +11800,7 @@
       </p:sp>
       <p:sp>
         <p:nvSpPr>
-          <p:cNvPr id="200" name=""/>
+          <p:cNvPr id="206" name=""/>
           <p:cNvSpPr/>
           <p:nvPr/>
         </p:nvSpPr>
@@ -11570,7 +11858,7 @@
       </p:sp>
       <p:sp>
         <p:nvSpPr>
-          <p:cNvPr id="201" name=""/>
+          <p:cNvPr id="207" name=""/>
           <p:cNvSpPr/>
           <p:nvPr/>
         </p:nvSpPr>
@@ -11628,7 +11916,7 @@
       </p:sp>
       <p:sp>
         <p:nvSpPr>
-          <p:cNvPr id="202" name=""/>
+          <p:cNvPr id="208" name=""/>
           <p:cNvSpPr/>
           <p:nvPr/>
         </p:nvSpPr>
@@ -11686,7 +11974,7 @@
       </p:sp>
       <p:sp>
         <p:nvSpPr>
-          <p:cNvPr id="203" name=""/>
+          <p:cNvPr id="209" name=""/>
           <p:cNvSpPr/>
           <p:nvPr/>
         </p:nvSpPr>
@@ -11744,7 +12032,7 @@
       </p:sp>
       <p:sp>
         <p:nvSpPr>
-          <p:cNvPr id="204" name=""/>
+          <p:cNvPr id="210" name=""/>
           <p:cNvSpPr/>
           <p:nvPr/>
         </p:nvSpPr>
@@ -11802,7 +12090,7 @@
       </p:sp>
       <p:sp>
         <p:nvSpPr>
-          <p:cNvPr id="205" name=""/>
+          <p:cNvPr id="211" name=""/>
           <p:cNvSpPr/>
           <p:nvPr/>
         </p:nvSpPr>
@@ -11860,7 +12148,7 @@
       </p:sp>
       <p:sp>
         <p:nvSpPr>
-          <p:cNvPr id="206" name=""/>
+          <p:cNvPr id="212" name=""/>
           <p:cNvSpPr/>
           <p:nvPr/>
         </p:nvSpPr>
@@ -11918,7 +12206,7 @@
       </p:sp>
       <p:sp>
         <p:nvSpPr>
-          <p:cNvPr id="207" name=""/>
+          <p:cNvPr id="213" name=""/>
           <p:cNvSpPr/>
           <p:nvPr/>
         </p:nvSpPr>
@@ -11976,7 +12264,7 @@
       </p:sp>
       <p:sp>
         <p:nvSpPr>
-          <p:cNvPr id="208" name=""/>
+          <p:cNvPr id="214" name=""/>
           <p:cNvSpPr/>
           <p:nvPr/>
         </p:nvSpPr>
@@ -12034,7 +12322,7 @@
       </p:sp>
       <p:sp>
         <p:nvSpPr>
-          <p:cNvPr id="209" name=""/>
+          <p:cNvPr id="215" name=""/>
           <p:cNvSpPr/>
           <p:nvPr/>
         </p:nvSpPr>
@@ -12092,7 +12380,7 @@
       </p:sp>
       <p:sp>
         <p:nvSpPr>
-          <p:cNvPr id="210" name=""/>
+          <p:cNvPr id="216" name=""/>
           <p:cNvSpPr/>
           <p:nvPr/>
         </p:nvSpPr>
@@ -12150,7 +12438,7 @@
       </p:sp>
       <p:sp>
         <p:nvSpPr>
-          <p:cNvPr id="211" name=""/>
+          <p:cNvPr id="217" name=""/>
           <p:cNvSpPr/>
           <p:nvPr/>
         </p:nvSpPr>
@@ -12208,7 +12496,7 @@
       </p:sp>
       <p:sp>
         <p:nvSpPr>
-          <p:cNvPr id="212" name=""/>
+          <p:cNvPr id="218" name=""/>
           <p:cNvSpPr/>
           <p:nvPr/>
         </p:nvSpPr>
@@ -12266,7 +12554,7 @@
       </p:sp>
       <p:sp>
         <p:nvSpPr>
-          <p:cNvPr id="213" name=""/>
+          <p:cNvPr id="219" name=""/>
           <p:cNvSpPr/>
           <p:nvPr/>
         </p:nvSpPr>
@@ -12324,7 +12612,7 @@
       </p:sp>
       <p:sp>
         <p:nvSpPr>
-          <p:cNvPr id="214" name=""/>
+          <p:cNvPr id="220" name=""/>
           <p:cNvSpPr/>
           <p:nvPr/>
         </p:nvSpPr>
@@ -12382,7 +12670,7 @@
       </p:sp>
       <p:sp>
         <p:nvSpPr>
-          <p:cNvPr id="215" name=""/>
+          <p:cNvPr id="221" name=""/>
           <p:cNvSpPr/>
           <p:nvPr/>
         </p:nvSpPr>
@@ -12440,7 +12728,7 @@
       </p:sp>
       <p:sp>
         <p:nvSpPr>
-          <p:cNvPr id="216" name=""/>
+          <p:cNvPr id="222" name=""/>
           <p:cNvSpPr/>
           <p:nvPr/>
         </p:nvSpPr>
@@ -12498,7 +12786,7 @@
       </p:sp>
       <p:sp>
         <p:nvSpPr>
-          <p:cNvPr id="217" name=""/>
+          <p:cNvPr id="223" name=""/>
           <p:cNvSpPr/>
           <p:nvPr/>
         </p:nvSpPr>
@@ -12556,7 +12844,7 @@
       </p:sp>
       <p:sp>
         <p:nvSpPr>
-          <p:cNvPr id="218" name=""/>
+          <p:cNvPr id="224" name=""/>
           <p:cNvSpPr/>
           <p:nvPr/>
         </p:nvSpPr>
@@ -12614,7 +12902,7 @@
       </p:sp>
       <p:sp>
         <p:nvSpPr>
-          <p:cNvPr id="219" name=""/>
+          <p:cNvPr id="225" name=""/>
           <p:cNvSpPr/>
           <p:nvPr/>
         </p:nvSpPr>
@@ -12672,7 +12960,7 @@
       </p:sp>
       <p:sp>
         <p:nvSpPr>
-          <p:cNvPr id="220" name=""/>
+          <p:cNvPr id="226" name=""/>
           <p:cNvSpPr/>
           <p:nvPr/>
         </p:nvSpPr>
@@ -12730,7 +13018,7 @@
       </p:sp>
       <p:sp>
         <p:nvSpPr>
-          <p:cNvPr id="221" name=""/>
+          <p:cNvPr id="227" name=""/>
           <p:cNvSpPr/>
           <p:nvPr/>
         </p:nvSpPr>
@@ -12788,7 +13076,7 @@
       </p:sp>
       <p:sp>
         <p:nvSpPr>
-          <p:cNvPr id="222" name=""/>
+          <p:cNvPr id="228" name=""/>
           <p:cNvSpPr/>
           <p:nvPr/>
         </p:nvSpPr>
@@ -12846,7 +13134,7 @@
       </p:sp>
       <p:sp>
         <p:nvSpPr>
-          <p:cNvPr id="223" name=""/>
+          <p:cNvPr id="229" name=""/>
           <p:cNvSpPr/>
           <p:nvPr/>
         </p:nvSpPr>
@@ -12904,7 +13192,7 @@
       </p:sp>
       <p:sp>
         <p:nvSpPr>
-          <p:cNvPr id="224" name=""/>
+          <p:cNvPr id="230" name=""/>
           <p:cNvSpPr/>
           <p:nvPr/>
         </p:nvSpPr>
@@ -12962,7 +13250,7 @@
       </p:sp>
       <p:sp>
         <p:nvSpPr>
-          <p:cNvPr id="225" name=""/>
+          <p:cNvPr id="231" name=""/>
           <p:cNvSpPr/>
           <p:nvPr/>
         </p:nvSpPr>
@@ -13020,7 +13308,7 @@
       </p:sp>
       <p:sp>
         <p:nvSpPr>
-          <p:cNvPr id="226" name=""/>
+          <p:cNvPr id="232" name=""/>
           <p:cNvSpPr/>
           <p:nvPr/>
         </p:nvSpPr>
@@ -13078,7 +13366,7 @@
       </p:sp>
       <p:sp>
         <p:nvSpPr>
-          <p:cNvPr id="227" name=""/>
+          <p:cNvPr id="233" name=""/>
           <p:cNvSpPr/>
           <p:nvPr/>
         </p:nvSpPr>
@@ -13136,7 +13424,7 @@
       </p:sp>
       <p:sp>
         <p:nvSpPr>
-          <p:cNvPr id="228" name=""/>
+          <p:cNvPr id="234" name=""/>
           <p:cNvSpPr/>
           <p:nvPr/>
         </p:nvSpPr>
@@ -13194,7 +13482,7 @@
       </p:sp>
       <p:sp>
         <p:nvSpPr>
-          <p:cNvPr id="229" name=""/>
+          <p:cNvPr id="235" name=""/>
           <p:cNvSpPr/>
           <p:nvPr/>
         </p:nvSpPr>
@@ -13252,7 +13540,7 @@
       </p:sp>
       <p:sp>
         <p:nvSpPr>
-          <p:cNvPr id="230" name=""/>
+          <p:cNvPr id="236" name=""/>
           <p:cNvSpPr/>
           <p:nvPr/>
         </p:nvSpPr>
@@ -13310,7 +13598,7 @@
       </p:sp>
       <p:sp>
         <p:nvSpPr>
-          <p:cNvPr id="231" name=""/>
+          <p:cNvPr id="237" name=""/>
           <p:cNvSpPr/>
           <p:nvPr/>
         </p:nvSpPr>
@@ -13368,7 +13656,7 @@
       </p:sp>
       <p:sp>
         <p:nvSpPr>
-          <p:cNvPr id="232" name=""/>
+          <p:cNvPr id="238" name=""/>
           <p:cNvSpPr/>
           <p:nvPr/>
         </p:nvSpPr>
@@ -13426,7 +13714,7 @@
       </p:sp>
       <p:sp>
         <p:nvSpPr>
-          <p:cNvPr id="233" name=""/>
+          <p:cNvPr id="239" name=""/>
           <p:cNvSpPr/>
           <p:nvPr/>
         </p:nvSpPr>
@@ -13484,7 +13772,7 @@
       </p:sp>
       <p:sp>
         <p:nvSpPr>
-          <p:cNvPr id="234" name=""/>
+          <p:cNvPr id="240" name=""/>
           <p:cNvSpPr/>
           <p:nvPr/>
         </p:nvSpPr>
@@ -13542,7 +13830,7 @@
       </p:sp>
       <p:sp>
         <p:nvSpPr>
-          <p:cNvPr id="235" name=""/>
+          <p:cNvPr id="241" name=""/>
           <p:cNvSpPr/>
           <p:nvPr/>
         </p:nvSpPr>
@@ -13600,7 +13888,7 @@
       </p:sp>
       <p:sp>
         <p:nvSpPr>
-          <p:cNvPr id="236" name=""/>
+          <p:cNvPr id="242" name=""/>
           <p:cNvSpPr/>
           <p:nvPr/>
         </p:nvSpPr>
@@ -13658,7 +13946,7 @@
       </p:sp>
       <p:sp>
         <p:nvSpPr>
-          <p:cNvPr id="237" name=""/>
+          <p:cNvPr id="243" name=""/>
           <p:cNvSpPr/>
           <p:nvPr/>
         </p:nvSpPr>
@@ -13716,7 +14004,7 @@
       </p:sp>
       <p:sp>
         <p:nvSpPr>
-          <p:cNvPr id="238" name=""/>
+          <p:cNvPr id="244" name=""/>
           <p:cNvSpPr/>
           <p:nvPr/>
         </p:nvSpPr>
@@ -13774,7 +14062,7 @@
       </p:sp>
       <p:sp>
         <p:nvSpPr>
-          <p:cNvPr id="239" name=""/>
+          <p:cNvPr id="245" name=""/>
           <p:cNvSpPr/>
           <p:nvPr/>
         </p:nvSpPr>
@@ -13832,7 +14120,7 @@
       </p:sp>
       <p:sp>
         <p:nvSpPr>
-          <p:cNvPr id="240" name=""/>
+          <p:cNvPr id="246" name=""/>
           <p:cNvSpPr/>
           <p:nvPr/>
         </p:nvSpPr>
@@ -13890,7 +14178,7 @@
       </p:sp>
       <p:sp>
         <p:nvSpPr>
-          <p:cNvPr id="241" name=""/>
+          <p:cNvPr id="247" name=""/>
           <p:cNvSpPr/>
           <p:nvPr/>
         </p:nvSpPr>
@@ -13948,7 +14236,7 @@
       </p:sp>
       <p:sp>
         <p:nvSpPr>
-          <p:cNvPr id="242" name=""/>
+          <p:cNvPr id="248" name=""/>
           <p:cNvSpPr/>
           <p:nvPr/>
         </p:nvSpPr>
@@ -14006,7 +14294,7 @@
       </p:sp>
       <p:sp>
         <p:nvSpPr>
-          <p:cNvPr id="243" name=""/>
+          <p:cNvPr id="249" name=""/>
           <p:cNvSpPr/>
           <p:nvPr/>
         </p:nvSpPr>
@@ -14064,7 +14352,7 @@
       </p:sp>
       <p:sp>
         <p:nvSpPr>
-          <p:cNvPr id="244" name=""/>
+          <p:cNvPr id="250" name=""/>
           <p:cNvSpPr/>
           <p:nvPr/>
         </p:nvSpPr>
@@ -14122,7 +14410,7 @@
       </p:sp>
       <p:sp>
         <p:nvSpPr>
-          <p:cNvPr id="245" name=""/>
+          <p:cNvPr id="251" name=""/>
           <p:cNvSpPr/>
           <p:nvPr/>
         </p:nvSpPr>
@@ -14180,7 +14468,7 @@
       </p:sp>
       <p:sp>
         <p:nvSpPr>
-          <p:cNvPr id="246" name=""/>
+          <p:cNvPr id="252" name=""/>
           <p:cNvSpPr/>
           <p:nvPr/>
         </p:nvSpPr>
@@ -14238,7 +14526,7 @@
       </p:sp>
       <p:sp>
         <p:nvSpPr>
-          <p:cNvPr id="247" name=""/>
+          <p:cNvPr id="253" name=""/>
           <p:cNvSpPr/>
           <p:nvPr/>
         </p:nvSpPr>
@@ -14296,7 +14584,7 @@
       </p:sp>
       <p:sp>
         <p:nvSpPr>
-          <p:cNvPr id="248" name=""/>
+          <p:cNvPr id="254" name=""/>
           <p:cNvSpPr/>
           <p:nvPr/>
         </p:nvSpPr>
@@ -14354,7 +14642,7 @@
       </p:sp>
       <p:sp>
         <p:nvSpPr>
-          <p:cNvPr id="249" name=""/>
+          <p:cNvPr id="255" name=""/>
           <p:cNvSpPr/>
           <p:nvPr/>
         </p:nvSpPr>
@@ -14412,7 +14700,7 @@
       </p:sp>
       <p:sp>
         <p:nvSpPr>
-          <p:cNvPr id="250" name=""/>
+          <p:cNvPr id="256" name=""/>
           <p:cNvSpPr/>
           <p:nvPr/>
         </p:nvSpPr>
@@ -14470,7 +14758,7 @@
       </p:sp>
       <p:sp>
         <p:nvSpPr>
-          <p:cNvPr id="251" name=""/>
+          <p:cNvPr id="257" name=""/>
           <p:cNvSpPr/>
           <p:nvPr/>
         </p:nvSpPr>
@@ -14528,7 +14816,7 @@
       </p:sp>
       <p:sp>
         <p:nvSpPr>
-          <p:cNvPr id="252" name=""/>
+          <p:cNvPr id="258" name=""/>
           <p:cNvSpPr/>
           <p:nvPr/>
         </p:nvSpPr>
@@ -14586,7 +14874,7 @@
       </p:sp>
       <p:sp>
         <p:nvSpPr>
-          <p:cNvPr id="253" name=""/>
+          <p:cNvPr id="259" name=""/>
           <p:cNvSpPr/>
           <p:nvPr/>
         </p:nvSpPr>
@@ -14644,7 +14932,7 @@
       </p:sp>
       <p:sp>
         <p:nvSpPr>
-          <p:cNvPr id="254" name=""/>
+          <p:cNvPr id="260" name=""/>
           <p:cNvSpPr/>
           <p:nvPr/>
         </p:nvSpPr>
@@ -14702,7 +14990,7 @@
       </p:sp>
       <p:sp>
         <p:nvSpPr>
-          <p:cNvPr id="255" name=""/>
+          <p:cNvPr id="261" name=""/>
           <p:cNvSpPr/>
           <p:nvPr/>
         </p:nvSpPr>
@@ -14760,7 +15048,7 @@
       </p:sp>
       <p:sp>
         <p:nvSpPr>
-          <p:cNvPr id="256" name=""/>
+          <p:cNvPr id="262" name=""/>
           <p:cNvSpPr/>
           <p:nvPr/>
         </p:nvSpPr>
@@ -14818,7 +15106,7 @@
       </p:sp>
       <p:sp>
         <p:nvSpPr>
-          <p:cNvPr id="257" name=""/>
+          <p:cNvPr id="263" name=""/>
           <p:cNvSpPr/>
           <p:nvPr/>
         </p:nvSpPr>
@@ -14876,7 +15164,7 @@
       </p:sp>
       <p:sp>
         <p:nvSpPr>
-          <p:cNvPr id="258" name=""/>
+          <p:cNvPr id="264" name=""/>
           <p:cNvSpPr/>
           <p:nvPr/>
         </p:nvSpPr>
@@ -14934,7 +15222,7 @@
       </p:sp>
       <p:sp>
         <p:nvSpPr>
-          <p:cNvPr id="259" name=""/>
+          <p:cNvPr id="265" name=""/>
           <p:cNvSpPr/>
           <p:nvPr/>
         </p:nvSpPr>
@@ -14992,7 +15280,7 @@
       </p:sp>
       <p:sp>
         <p:nvSpPr>
-          <p:cNvPr id="260" name=""/>
+          <p:cNvPr id="266" name=""/>
           <p:cNvSpPr/>
           <p:nvPr/>
         </p:nvSpPr>
@@ -15050,7 +15338,7 @@
       </p:sp>
       <p:sp>
         <p:nvSpPr>
-          <p:cNvPr id="261" name=""/>
+          <p:cNvPr id="267" name=""/>
           <p:cNvSpPr/>
           <p:nvPr/>
         </p:nvSpPr>
@@ -15108,7 +15396,7 @@
       </p:sp>
       <p:sp>
         <p:nvSpPr>
-          <p:cNvPr id="262" name=""/>
+          <p:cNvPr id="268" name=""/>
           <p:cNvSpPr/>
           <p:nvPr/>
         </p:nvSpPr>
@@ -15166,7 +15454,7 @@
       </p:sp>
       <p:sp>
         <p:nvSpPr>
-          <p:cNvPr id="263" name=""/>
+          <p:cNvPr id="269" name=""/>
           <p:cNvSpPr/>
           <p:nvPr/>
         </p:nvSpPr>
@@ -15224,7 +15512,7 @@
       </p:sp>
       <p:sp>
         <p:nvSpPr>
-          <p:cNvPr id="264" name=""/>
+          <p:cNvPr id="270" name=""/>
           <p:cNvSpPr/>
           <p:nvPr/>
         </p:nvSpPr>
@@ -15282,7 +15570,7 @@
       </p:sp>
       <p:sp>
         <p:nvSpPr>
-          <p:cNvPr id="265" name=""/>
+          <p:cNvPr id="271" name=""/>
           <p:cNvSpPr/>
           <p:nvPr/>
         </p:nvSpPr>
@@ -15340,7 +15628,7 @@
       </p:sp>
       <p:sp>
         <p:nvSpPr>
-          <p:cNvPr id="266" name=""/>
+          <p:cNvPr id="272" name=""/>
           <p:cNvSpPr/>
           <p:nvPr/>
         </p:nvSpPr>
@@ -15398,7 +15686,7 @@
       </p:sp>
       <p:sp>
         <p:nvSpPr>
-          <p:cNvPr id="267" name=""/>
+          <p:cNvPr id="273" name=""/>
           <p:cNvSpPr/>
           <p:nvPr/>
         </p:nvSpPr>
@@ -15456,7 +15744,7 @@
       </p:sp>
       <p:sp>
         <p:nvSpPr>
-          <p:cNvPr id="268" name=""/>
+          <p:cNvPr id="274" name=""/>
           <p:cNvSpPr/>
           <p:nvPr/>
         </p:nvSpPr>
@@ -15514,7 +15802,7 @@
       </p:sp>
       <p:sp>
         <p:nvSpPr>
-          <p:cNvPr id="269" name=""/>
+          <p:cNvPr id="275" name=""/>
           <p:cNvSpPr/>
           <p:nvPr/>
         </p:nvSpPr>
@@ -15572,7 +15860,7 @@
       </p:sp>
       <p:sp>
         <p:nvSpPr>
-          <p:cNvPr id="270" name=""/>
+          <p:cNvPr id="276" name=""/>
           <p:cNvSpPr/>
           <p:nvPr/>
         </p:nvSpPr>
@@ -15630,7 +15918,7 @@
       </p:sp>
       <p:sp>
         <p:nvSpPr>
-          <p:cNvPr id="271" name=""/>
+          <p:cNvPr id="277" name=""/>
           <p:cNvSpPr/>
           <p:nvPr/>
         </p:nvSpPr>
@@ -15688,7 +15976,7 @@
       </p:sp>
       <p:sp>
         <p:nvSpPr>
-          <p:cNvPr id="272" name=""/>
+          <p:cNvPr id="278" name=""/>
           <p:cNvSpPr/>
           <p:nvPr/>
         </p:nvSpPr>
@@ -15746,7 +16034,7 @@
       </p:sp>
       <p:sp>
         <p:nvSpPr>
-          <p:cNvPr id="273" name=""/>
+          <p:cNvPr id="279" name=""/>
           <p:cNvSpPr/>
           <p:nvPr/>
         </p:nvSpPr>
@@ -15804,7 +16092,7 @@
       </p:sp>
       <p:sp>
         <p:nvSpPr>
-          <p:cNvPr id="274" name=""/>
+          <p:cNvPr id="280" name=""/>
           <p:cNvSpPr/>
           <p:nvPr/>
         </p:nvSpPr>
@@ -15862,7 +16150,7 @@
       </p:sp>
       <p:sp>
         <p:nvSpPr>
-          <p:cNvPr id="275" name=""/>
+          <p:cNvPr id="281" name=""/>
           <p:cNvSpPr/>
           <p:nvPr/>
         </p:nvSpPr>
@@ -15920,7 +16208,7 @@
       </p:sp>
       <p:sp>
         <p:nvSpPr>
-          <p:cNvPr id="276" name=""/>
+          <p:cNvPr id="282" name=""/>
           <p:cNvSpPr/>
           <p:nvPr/>
         </p:nvSpPr>
@@ -15978,7 +16266,7 @@
       </p:sp>
       <p:sp>
         <p:nvSpPr>
-          <p:cNvPr id="277" name=""/>
+          <p:cNvPr id="283" name=""/>
           <p:cNvSpPr/>
           <p:nvPr/>
         </p:nvSpPr>
@@ -16036,7 +16324,7 @@
       </p:sp>
       <p:sp>
         <p:nvSpPr>
-          <p:cNvPr id="278" name=""/>
+          <p:cNvPr id="284" name=""/>
           <p:cNvSpPr/>
           <p:nvPr/>
         </p:nvSpPr>
@@ -16094,7 +16382,7 @@
       </p:sp>
       <p:sp>
         <p:nvSpPr>
-          <p:cNvPr id="279" name=""/>
+          <p:cNvPr id="285" name=""/>
           <p:cNvSpPr/>
           <p:nvPr/>
         </p:nvSpPr>
@@ -16152,7 +16440,7 @@
       </p:sp>
       <p:sp>
         <p:nvSpPr>
-          <p:cNvPr id="280" name=""/>
+          <p:cNvPr id="286" name=""/>
           <p:cNvSpPr/>
           <p:nvPr/>
         </p:nvSpPr>
@@ -16210,7 +16498,7 @@
       </p:sp>
       <p:sp>
         <p:nvSpPr>
-          <p:cNvPr id="281" name=""/>
+          <p:cNvPr id="287" name=""/>
           <p:cNvSpPr/>
           <p:nvPr/>
         </p:nvSpPr>
@@ -16268,7 +16556,7 @@
       </p:sp>
       <p:sp>
         <p:nvSpPr>
-          <p:cNvPr id="282" name=""/>
+          <p:cNvPr id="288" name=""/>
           <p:cNvSpPr/>
           <p:nvPr/>
         </p:nvSpPr>
@@ -16326,7 +16614,7 @@
       </p:sp>
       <p:sp>
         <p:nvSpPr>
-          <p:cNvPr id="283" name=""/>
+          <p:cNvPr id="289" name=""/>
           <p:cNvSpPr/>
           <p:nvPr/>
         </p:nvSpPr>
@@ -16384,7 +16672,7 @@
       </p:sp>
       <p:sp>
         <p:nvSpPr>
-          <p:cNvPr id="284" name=""/>
+          <p:cNvPr id="290" name=""/>
           <p:cNvSpPr/>
           <p:nvPr/>
         </p:nvSpPr>
@@ -16442,7 +16730,7 @@
       </p:sp>
       <p:sp>
         <p:nvSpPr>
-          <p:cNvPr id="285" name=""/>
+          <p:cNvPr id="291" name=""/>
           <p:cNvSpPr/>
           <p:nvPr/>
         </p:nvSpPr>
@@ -16500,7 +16788,7 @@
       </p:sp>
       <p:sp>
         <p:nvSpPr>
-          <p:cNvPr id="286" name=""/>
+          <p:cNvPr id="292" name=""/>
           <p:cNvSpPr/>
           <p:nvPr/>
         </p:nvSpPr>
@@ -16558,7 +16846,7 @@
       </p:sp>
       <p:sp>
         <p:nvSpPr>
-          <p:cNvPr id="287" name=""/>
+          <p:cNvPr id="293" name=""/>
           <p:cNvSpPr/>
           <p:nvPr/>
         </p:nvSpPr>
@@ -16616,7 +16904,7 @@
       </p:sp>
       <p:sp>
         <p:nvSpPr>
-          <p:cNvPr id="288" name=""/>
+          <p:cNvPr id="294" name=""/>
           <p:cNvSpPr/>
           <p:nvPr/>
         </p:nvSpPr>
@@ -16674,7 +16962,7 @@
       </p:sp>
       <p:sp>
         <p:nvSpPr>
-          <p:cNvPr id="289" name=""/>
+          <p:cNvPr id="295" name=""/>
           <p:cNvSpPr/>
           <p:nvPr/>
         </p:nvSpPr>
@@ -16732,7 +17020,7 @@
       </p:sp>
       <p:sp>
         <p:nvSpPr>
-          <p:cNvPr id="290" name=""/>
+          <p:cNvPr id="296" name=""/>
           <p:cNvSpPr/>
           <p:nvPr/>
         </p:nvSpPr>
@@ -16787,7 +17075,7 @@
       </p:sp>
       <p:sp>
         <p:nvSpPr>
-          <p:cNvPr id="291" name=""/>
+          <p:cNvPr id="297" name=""/>
           <p:cNvSpPr txBox="1"/>
           <p:nvPr/>
         </p:nvSpPr>

--- a/GFX-T Onboarding Kit/PPT/03 - Go-Live & Handover.pptx
+++ b/GFX-T Onboarding Kit/PPT/03 - Go-Live & Handover.pptx
@@ -4560,7 +4560,7 @@
         <p:spPr>
           <a:xfrm>
             <a:off x="647640" y="8178120"/>
-            <a:ext cx="1674000" cy="100800"/>
+            <a:ext cx="1158840" cy="100800"/>
           </a:xfrm>
           <a:prstGeom prst="rect">
             <a:avLst/>
@@ -4583,7 +4583,7 @@
                 <a:latin typeface="Inter-Semi"/>
                 <a:ea typeface="Inter-Semi"/>
               </a:rPr>
-              <a:t>C E O   &amp;   F O U N D E R   ·   DAT E</a:t>
+              <a:t>F O U N D E R   ·   DAT E</a:t>
             </a:r>
             <a:endParaRPr b="0" lang="en-US" sz="680" spc="-1" strike="noStrike">
               <a:solidFill>
@@ -4848,7 +4848,7 @@
         <p:spPr>
           <a:xfrm>
             <a:off x="2832840" y="8178120"/>
-            <a:ext cx="2288160" cy="100800"/>
+            <a:ext cx="2021400" cy="100800"/>
           </a:xfrm>
           <a:prstGeom prst="rect">
             <a:avLst/>
@@ -4871,7 +4871,7 @@
                 <a:latin typeface="Inter-Semi"/>
                 <a:ea typeface="Inter-Semi"/>
               </a:rPr>
-              <a:t>C O - F O U N D E R   &amp;   PA R T N E R   ·   DAT E</a:t>
+              <a:t>M A N AG I N G   D I R E C T O R   ·   DAT E</a:t>
             </a:r>
             <a:endParaRPr b="0" lang="en-US" sz="680" spc="-1" strike="noStrike">
               <a:solidFill>
